--- a/public/lessons/year-6-maths/autumn/week-4/use-short-division-with-two-digit-divisors/teaching-powerpoint-v1.pptx
+++ b/public/lessons/year-6-maths/autumn/week-4/use-short-division-with-two-digit-divisors/teaching-powerpoint-v1.pptx
@@ -2,24 +2,24 @@
 <file path=ppt/presentation.xml><?xml version="1.0" encoding="utf-8"?>
 <p:presentation xmlns:p="http://schemas.openxmlformats.org/presentationml/2006/main">
   <p:sldMasterIdLst>
-    <p:sldMasterId xmlns:r="http://schemas.openxmlformats.org/officeDocument/2006/relationships" id="2147483648" r:id="R9fd7d34ecdb040da"/>
+    <p:sldMasterId xmlns:r="http://schemas.openxmlformats.org/officeDocument/2006/relationships" id="2147483648" r:id="R96312a2c867e465c"/>
   </p:sldMasterIdLst>
   <p:notesMasterIdLst>
-    <p:notesMasterId xmlns:r="http://schemas.openxmlformats.org/officeDocument/2006/relationships" r:id="R90c67ce1b0aa45da"/>
+    <p:notesMasterId xmlns:r="http://schemas.openxmlformats.org/officeDocument/2006/relationships" r:id="Rf50dedfe07274c96"/>
   </p:notesMasterIdLst>
   <p:sldIdLst>
-    <p:sldId xmlns:r="http://schemas.openxmlformats.org/officeDocument/2006/relationships" id="256" r:id="Rebc4791aeed346ed"/>
-    <p:sldId xmlns:r="http://schemas.openxmlformats.org/officeDocument/2006/relationships" id="257" r:id="Re9e201bdb6b54e38"/>
-    <p:sldId xmlns:r="http://schemas.openxmlformats.org/officeDocument/2006/relationships" id="258" r:id="R52e40f1dc819416b"/>
-    <p:sldId xmlns:r="http://schemas.openxmlformats.org/officeDocument/2006/relationships" id="259" r:id="Rf359a67a996d4fc1"/>
-    <p:sldId xmlns:r="http://schemas.openxmlformats.org/officeDocument/2006/relationships" id="260" r:id="Rd791cb86a1e5487f"/>
-    <p:sldId xmlns:r="http://schemas.openxmlformats.org/officeDocument/2006/relationships" id="261" r:id="R8cb39e34476a4eab"/>
-    <p:sldId xmlns:r="http://schemas.openxmlformats.org/officeDocument/2006/relationships" id="262" r:id="R404f8b420347443c"/>
-    <p:sldId xmlns:r="http://schemas.openxmlformats.org/officeDocument/2006/relationships" id="263" r:id="R19c01d4a1ea24696"/>
-    <p:sldId xmlns:r="http://schemas.openxmlformats.org/officeDocument/2006/relationships" id="264" r:id="Rdb5f040862d74c5f"/>
-    <p:sldId xmlns:r="http://schemas.openxmlformats.org/officeDocument/2006/relationships" id="265" r:id="R7e194fca41124965"/>
-    <p:sldId xmlns:r="http://schemas.openxmlformats.org/officeDocument/2006/relationships" id="266" r:id="R07f335d039fc43b2"/>
-    <p:sldId xmlns:r="http://schemas.openxmlformats.org/officeDocument/2006/relationships" id="267" r:id="R257adf94dbd14699"/>
+    <p:sldId xmlns:r="http://schemas.openxmlformats.org/officeDocument/2006/relationships" id="256" r:id="Rff5b1d9fe9734f1f"/>
+    <p:sldId xmlns:r="http://schemas.openxmlformats.org/officeDocument/2006/relationships" id="257" r:id="R8e5350e613f84da7"/>
+    <p:sldId xmlns:r="http://schemas.openxmlformats.org/officeDocument/2006/relationships" id="258" r:id="Rafc31990e67f4874"/>
+    <p:sldId xmlns:r="http://schemas.openxmlformats.org/officeDocument/2006/relationships" id="259" r:id="R98627637c7b74e92"/>
+    <p:sldId xmlns:r="http://schemas.openxmlformats.org/officeDocument/2006/relationships" id="260" r:id="R5d84927003204dc1"/>
+    <p:sldId xmlns:r="http://schemas.openxmlformats.org/officeDocument/2006/relationships" id="261" r:id="R488107feb9fc4e00"/>
+    <p:sldId xmlns:r="http://schemas.openxmlformats.org/officeDocument/2006/relationships" id="262" r:id="R031536acd4314221"/>
+    <p:sldId xmlns:r="http://schemas.openxmlformats.org/officeDocument/2006/relationships" id="263" r:id="R33567110c5954d96"/>
+    <p:sldId xmlns:r="http://schemas.openxmlformats.org/officeDocument/2006/relationships" id="264" r:id="Rf48d2d40023b40ad"/>
+    <p:sldId xmlns:r="http://schemas.openxmlformats.org/officeDocument/2006/relationships" id="265" r:id="R6a87336c75e848fd"/>
+    <p:sldId xmlns:r="http://schemas.openxmlformats.org/officeDocument/2006/relationships" id="266" r:id="Ree7055846de94532"/>
+    <p:sldId xmlns:r="http://schemas.openxmlformats.org/officeDocument/2006/relationships" id="267" r:id="R6dafce6e848d4047"/>
   </p:sldIdLst>
   <p:sldSz cx="12192000" cy="6858000"/>
   <p:notesSz cx="6858000" cy="9144000"/>
@@ -873,7 +873,7 @@
           <a:lstStyle xmlns:a="http://schemas.openxmlformats.org/drawingml/2006/main"/>
           <a:p xmlns:a="http://schemas.openxmlformats.org/drawingml/2006/main">
             <a:r>
-              <a:t>I do. Reveal the question, setup and each calculation stage one click at a time. Pupils watch before copying. Model answer: 312.</a:t>
+              <a:t>I do. Reveal the question, then reveal each mathematical change one click at a time. Point to the numbers and operation that changed before moving to the next line. Final answer: 312.</a:t>
             </a:r>
           </a:p>
         </p:txBody>
@@ -1291,7 +1291,7 @@
   </p:cSld>
   <p:clrMap bg1="lt1" tx1="dk1" bg2="lt2" tx2="dk2" accent1="accent1" accent2="accent2" accent3="accent3" accent4="accent4" accent5="accent5" accent6="accent6" hlink="hlink" folHlink="folHlink"/>
   <p:sldLayoutIdLst>
-    <p:sldLayoutId xmlns:r="http://schemas.openxmlformats.org/officeDocument/2006/relationships" id="2147483649" r:id="R1b29d66d95ed4c92"/>
+    <p:sldLayoutId xmlns:r="http://schemas.openxmlformats.org/officeDocument/2006/relationships" id="2147483649" r:id="R745f55e6618c4b91"/>
   </p:sldLayoutIdLst>
   <p:txStyles>
     <p:titleStyle>
@@ -1842,7 +1842,7 @@
           <p:cNvPr id="12" name="">
             <a:extLst xmlns:a="http://schemas.openxmlformats.org/drawingml/2006/main">
               <a:ext uri="{FF2B5EF4-FFF2-40B4-BE49-F238E27FC236}">
-                <a16:creationId xmlns:a16="http://schemas.microsoft.com/office/drawing/2014/main" id="{A36C1AB4-DB4C-4C80-B20A-F11C2AADA8F5}"/>
+                <a16:creationId xmlns:a16="http://schemas.microsoft.com/office/drawing/2014/main" id="{82A509C3-0624-4759-A3F4-328A77D5E032}"/>
               </a:ext>
             </a:extLst>
           </p:cNvPr>
@@ -1874,7 +1874,7 @@
           <p:cNvPr id="2" name="">
             <a:extLst xmlns:a="http://schemas.openxmlformats.org/drawingml/2006/main">
               <a:ext uri="{FF2B5EF4-FFF2-40B4-BE49-F238E27FC236}">
-                <a16:creationId xmlns:a16="http://schemas.microsoft.com/office/drawing/2014/main" id="{210B7999-D0DD-452B-BBA4-EA0B39B683FD}"/>
+                <a16:creationId xmlns:a16="http://schemas.microsoft.com/office/drawing/2014/main" id="{CD6097DB-562E-4010-8E09-8C7B75F1E34B}"/>
               </a:ext>
             </a:extLst>
           </p:cNvPr>
@@ -1931,7 +1931,7 @@
           <p:cNvPr id="3" name="">
             <a:extLst xmlns:a="http://schemas.openxmlformats.org/drawingml/2006/main">
               <a:ext uri="{FF2B5EF4-FFF2-40B4-BE49-F238E27FC236}">
-                <a16:creationId xmlns:a16="http://schemas.microsoft.com/office/drawing/2014/main" id="{46C294D7-BD8A-43CC-86EE-6FACA259153E}"/>
+                <a16:creationId xmlns:a16="http://schemas.microsoft.com/office/drawing/2014/main" id="{FBD62C54-FA47-4490-84FC-0B078D7652BD}"/>
               </a:ext>
             </a:extLst>
           </p:cNvPr>
@@ -1965,7 +1965,7 @@
           <p:cNvPr id="4" name="">
             <a:extLst xmlns:a="http://schemas.openxmlformats.org/drawingml/2006/main">
               <a:ext uri="{FF2B5EF4-FFF2-40B4-BE49-F238E27FC236}">
-                <a16:creationId xmlns:a16="http://schemas.microsoft.com/office/drawing/2014/main" id="{06FA6A27-6374-4771-A753-D41C26A61C6D}"/>
+                <a16:creationId xmlns:a16="http://schemas.microsoft.com/office/drawing/2014/main" id="{68022FE0-B574-4860-846D-E19B703C5F67}"/>
               </a:ext>
             </a:extLst>
           </p:cNvPr>
@@ -2022,7 +2022,7 @@
           <p:cNvPr id="5" name="">
             <a:extLst xmlns:a="http://schemas.openxmlformats.org/drawingml/2006/main">
               <a:ext uri="{FF2B5EF4-FFF2-40B4-BE49-F238E27FC236}">
-                <a16:creationId xmlns:a16="http://schemas.microsoft.com/office/drawing/2014/main" id="{E9CAE981-2862-4A99-9D19-EF9B7B2BAF9B}"/>
+                <a16:creationId xmlns:a16="http://schemas.microsoft.com/office/drawing/2014/main" id="{83C8E153-024F-4578-BFB6-6E8C0880C54A}"/>
               </a:ext>
             </a:extLst>
           </p:cNvPr>
@@ -2079,7 +2079,7 @@
           <p:cNvPr id="6" name="">
             <a:extLst xmlns:a="http://schemas.openxmlformats.org/drawingml/2006/main">
               <a:ext uri="{FF2B5EF4-FFF2-40B4-BE49-F238E27FC236}">
-                <a16:creationId xmlns:a16="http://schemas.microsoft.com/office/drawing/2014/main" id="{1570E540-3226-47B5-87FF-35BD4B654E15}"/>
+                <a16:creationId xmlns:a16="http://schemas.microsoft.com/office/drawing/2014/main" id="{B7EB18FF-728A-44EA-AF0C-43443F4416AD}"/>
               </a:ext>
             </a:extLst>
           </p:cNvPr>
@@ -2113,7 +2113,7 @@
           <p:cNvPr id="7" name="">
             <a:extLst xmlns:a="http://schemas.openxmlformats.org/drawingml/2006/main">
               <a:ext uri="{FF2B5EF4-FFF2-40B4-BE49-F238E27FC236}">
-                <a16:creationId xmlns:a16="http://schemas.microsoft.com/office/drawing/2014/main" id="{314CE2C8-4F6D-4767-B06E-1D640DDAF16B}"/>
+                <a16:creationId xmlns:a16="http://schemas.microsoft.com/office/drawing/2014/main" id="{50112997-7D19-401C-9BFD-503277D152F8}"/>
               </a:ext>
             </a:extLst>
           </p:cNvPr>
@@ -2170,7 +2170,7 @@
           <p:cNvPr id="8" name="">
             <a:extLst xmlns:a="http://schemas.openxmlformats.org/drawingml/2006/main">
               <a:ext uri="{FF2B5EF4-FFF2-40B4-BE49-F238E27FC236}">
-                <a16:creationId xmlns:a16="http://schemas.microsoft.com/office/drawing/2014/main" id="{05AC87F7-1B38-4368-98DF-AD17774EED09}"/>
+                <a16:creationId xmlns:a16="http://schemas.microsoft.com/office/drawing/2014/main" id="{3E0E6588-57C2-478D-8C23-7D1DB7410DD1}"/>
               </a:ext>
             </a:extLst>
           </p:cNvPr>
@@ -2227,7 +2227,7 @@
           <p:cNvPr id="9" name="">
             <a:extLst xmlns:a="http://schemas.openxmlformats.org/drawingml/2006/main">
               <a:ext uri="{FF2B5EF4-FFF2-40B4-BE49-F238E27FC236}">
-                <a16:creationId xmlns:a16="http://schemas.microsoft.com/office/drawing/2014/main" id="{B55D1C53-A9D0-497C-ADEF-7A0709CD6C5E}"/>
+                <a16:creationId xmlns:a16="http://schemas.microsoft.com/office/drawing/2014/main" id="{5E461C60-D644-4B7A-AE26-B6EE690AAED7}"/>
               </a:ext>
             </a:extLst>
           </p:cNvPr>
@@ -2284,7 +2284,7 @@
           <p:cNvPr id="10" name="">
             <a:extLst xmlns:a="http://schemas.openxmlformats.org/drawingml/2006/main">
               <a:ext uri="{FF2B5EF4-FFF2-40B4-BE49-F238E27FC236}">
-                <a16:creationId xmlns:a16="http://schemas.microsoft.com/office/drawing/2014/main" id="{A446830F-E20F-4B19-9372-FA78322DC26A}"/>
+                <a16:creationId xmlns:a16="http://schemas.microsoft.com/office/drawing/2014/main" id="{291D16A1-4198-4237-8D0C-8DB8D582C441}"/>
               </a:ext>
             </a:extLst>
           </p:cNvPr>
@@ -2341,7 +2341,7 @@
           <p:cNvPr id="11" name="">
             <a:extLst xmlns:a="http://schemas.openxmlformats.org/drawingml/2006/main">
               <a:ext uri="{FF2B5EF4-FFF2-40B4-BE49-F238E27FC236}">
-                <a16:creationId xmlns:a16="http://schemas.microsoft.com/office/drawing/2014/main" id="{9D39EE42-0DEC-4A32-A5A9-529F242CFEE6}"/>
+                <a16:creationId xmlns:a16="http://schemas.microsoft.com/office/drawing/2014/main" id="{430AE76D-7A49-49FD-A83E-B9F0466A1934}"/>
               </a:ext>
             </a:extLst>
           </p:cNvPr>
@@ -2396,7 +2396,7 @@
     </p:spTree>
     <p:extLst>
       <p:ext uri="{BB962C8B-B14F-4D97-AF65-F5344CB8AC3E}">
-        <p14:creationId xmlns:p14="http://schemas.microsoft.com/office/powerpoint/2010/main" val="820212222"/>
+        <p14:creationId xmlns:p14="http://schemas.microsoft.com/office/powerpoint/2010/main" val="1872127469"/>
       </p:ext>
     </p:extLst>
   </p:cSld>
@@ -2427,7 +2427,7 @@
           <p:cNvPr id="14" name="">
             <a:extLst xmlns:a="http://schemas.openxmlformats.org/drawingml/2006/main">
               <a:ext uri="{FF2B5EF4-FFF2-40B4-BE49-F238E27FC236}">
-                <a16:creationId xmlns:a16="http://schemas.microsoft.com/office/drawing/2014/main" id="{B5C4461B-A2EC-4CFC-BC0B-02DD27A68C78}"/>
+                <a16:creationId xmlns:a16="http://schemas.microsoft.com/office/drawing/2014/main" id="{E47AAD79-C649-49B3-9E3C-F0E2F0B81314}"/>
               </a:ext>
             </a:extLst>
           </p:cNvPr>
@@ -2459,7 +2459,7 @@
           <p:cNvPr id="2" name="">
             <a:extLst xmlns:a="http://schemas.openxmlformats.org/drawingml/2006/main">
               <a:ext uri="{FF2B5EF4-FFF2-40B4-BE49-F238E27FC236}">
-                <a16:creationId xmlns:a16="http://schemas.microsoft.com/office/drawing/2014/main" id="{CDEF3047-B2C5-4FE8-B3BF-3540D78D5656}"/>
+                <a16:creationId xmlns:a16="http://schemas.microsoft.com/office/drawing/2014/main" id="{CE2794A9-D9BB-4E3F-AD6A-66A0C5C993EF}"/>
               </a:ext>
             </a:extLst>
           </p:cNvPr>
@@ -2516,7 +2516,7 @@
           <p:cNvPr id="3" name="">
             <a:extLst xmlns:a="http://schemas.openxmlformats.org/drawingml/2006/main">
               <a:ext uri="{FF2B5EF4-FFF2-40B4-BE49-F238E27FC236}">
-                <a16:creationId xmlns:a16="http://schemas.microsoft.com/office/drawing/2014/main" id="{B0421C3D-E909-446E-B669-81EDF5A09E00}"/>
+                <a16:creationId xmlns:a16="http://schemas.microsoft.com/office/drawing/2014/main" id="{E081A46E-C34E-432B-8309-94EE5698D305}"/>
               </a:ext>
             </a:extLst>
           </p:cNvPr>
@@ -2548,7 +2548,7 @@
           <p:cNvPr id="4" name="">
             <a:extLst xmlns:a="http://schemas.openxmlformats.org/drawingml/2006/main">
               <a:ext uri="{FF2B5EF4-FFF2-40B4-BE49-F238E27FC236}">
-                <a16:creationId xmlns:a16="http://schemas.microsoft.com/office/drawing/2014/main" id="{F3F6DBD1-3AD5-4E5C-9671-A1B59C9545FC}"/>
+                <a16:creationId xmlns:a16="http://schemas.microsoft.com/office/drawing/2014/main" id="{CEE85164-AEA2-4AE2-9E45-E0B4B485D1A4}"/>
               </a:ext>
             </a:extLst>
           </p:cNvPr>
@@ -2605,7 +2605,7 @@
           <p:cNvPr id="5" name="">
             <a:extLst xmlns:a="http://schemas.openxmlformats.org/drawingml/2006/main">
               <a:ext uri="{FF2B5EF4-FFF2-40B4-BE49-F238E27FC236}">
-                <a16:creationId xmlns:a16="http://schemas.microsoft.com/office/drawing/2014/main" id="{C7BC9C61-E6E4-49F0-B833-B35C1095835F}"/>
+                <a16:creationId xmlns:a16="http://schemas.microsoft.com/office/drawing/2014/main" id="{9FB6A105-3B8F-4E2C-A3D6-FB1DDD8C2566}"/>
               </a:ext>
             </a:extLst>
           </p:cNvPr>
@@ -2662,7 +2662,7 @@
           <p:cNvPr id="6" name="">
             <a:extLst xmlns:a="http://schemas.openxmlformats.org/drawingml/2006/main">
               <a:ext uri="{FF2B5EF4-FFF2-40B4-BE49-F238E27FC236}">
-                <a16:creationId xmlns:a16="http://schemas.microsoft.com/office/drawing/2014/main" id="{A2A1EB64-74D6-4619-B66C-4C51BE71D7BA}"/>
+                <a16:creationId xmlns:a16="http://schemas.microsoft.com/office/drawing/2014/main" id="{BB527755-9693-4F5E-AD3E-C529BDD800D9}"/>
               </a:ext>
             </a:extLst>
           </p:cNvPr>
@@ -2719,7 +2719,7 @@
           <p:cNvPr id="7" name="">
             <a:extLst xmlns:a="http://schemas.openxmlformats.org/drawingml/2006/main">
               <a:ext uri="{FF2B5EF4-FFF2-40B4-BE49-F238E27FC236}">
-                <a16:creationId xmlns:a16="http://schemas.microsoft.com/office/drawing/2014/main" id="{2DF43A9F-0F24-4C64-B4D9-B8549C9F82ED}"/>
+                <a16:creationId xmlns:a16="http://schemas.microsoft.com/office/drawing/2014/main" id="{940BB5C4-2960-4E7E-9914-C80B97257D91}"/>
               </a:ext>
             </a:extLst>
           </p:cNvPr>
@@ -2751,7 +2751,7 @@
           <p:cNvPr id="8" name="">
             <a:extLst xmlns:a="http://schemas.openxmlformats.org/drawingml/2006/main">
               <a:ext uri="{FF2B5EF4-FFF2-40B4-BE49-F238E27FC236}">
-                <a16:creationId xmlns:a16="http://schemas.microsoft.com/office/drawing/2014/main" id="{6F37159D-E22A-4656-A98E-D547E8AA9C77}"/>
+                <a16:creationId xmlns:a16="http://schemas.microsoft.com/office/drawing/2014/main" id="{12270C28-A674-4459-9196-905F517FE953}"/>
               </a:ext>
             </a:extLst>
           </p:cNvPr>
@@ -2808,7 +2808,7 @@
           <p:cNvPr id="9" name="">
             <a:extLst xmlns:a="http://schemas.openxmlformats.org/drawingml/2006/main">
               <a:ext uri="{FF2B5EF4-FFF2-40B4-BE49-F238E27FC236}">
-                <a16:creationId xmlns:a16="http://schemas.microsoft.com/office/drawing/2014/main" id="{8DDDD2F3-1E46-487A-85B9-126AB65D7245}"/>
+                <a16:creationId xmlns:a16="http://schemas.microsoft.com/office/drawing/2014/main" id="{F2F1FB7A-3729-4A16-9A72-A9CF0C8174AA}"/>
               </a:ext>
             </a:extLst>
           </p:cNvPr>
@@ -2865,7 +2865,7 @@
           <p:cNvPr id="10" name="">
             <a:extLst xmlns:a="http://schemas.openxmlformats.org/drawingml/2006/main">
               <a:ext uri="{FF2B5EF4-FFF2-40B4-BE49-F238E27FC236}">
-                <a16:creationId xmlns:a16="http://schemas.microsoft.com/office/drawing/2014/main" id="{843C5778-7449-4A96-BCDB-96FA2854EA68}"/>
+                <a16:creationId xmlns:a16="http://schemas.microsoft.com/office/drawing/2014/main" id="{EB3B7E67-8F57-4FFF-B9E3-DC0C8E2AA846}"/>
               </a:ext>
             </a:extLst>
           </p:cNvPr>
@@ -2922,7 +2922,7 @@
           <p:cNvPr id="11" name="">
             <a:extLst xmlns:a="http://schemas.openxmlformats.org/drawingml/2006/main">
               <a:ext uri="{FF2B5EF4-FFF2-40B4-BE49-F238E27FC236}">
-                <a16:creationId xmlns:a16="http://schemas.microsoft.com/office/drawing/2014/main" id="{17DA5AF2-59AC-4A02-B49A-7FEC0E1ED3F8}"/>
+                <a16:creationId xmlns:a16="http://schemas.microsoft.com/office/drawing/2014/main" id="{C104E348-9A36-49A6-B147-E116E6D59CF4}"/>
               </a:ext>
             </a:extLst>
           </p:cNvPr>
@@ -2979,7 +2979,7 @@
           <p:cNvPr id="12" name="">
             <a:extLst xmlns:a="http://schemas.openxmlformats.org/drawingml/2006/main">
               <a:ext uri="{FF2B5EF4-FFF2-40B4-BE49-F238E27FC236}">
-                <a16:creationId xmlns:a16="http://schemas.microsoft.com/office/drawing/2014/main" id="{9BAFA7AF-509B-49D4-AD8D-519705661EA4}"/>
+                <a16:creationId xmlns:a16="http://schemas.microsoft.com/office/drawing/2014/main" id="{65E89A7C-6D68-4430-B150-90A319DAFB5A}"/>
               </a:ext>
             </a:extLst>
           </p:cNvPr>
@@ -3036,7 +3036,7 @@
           <p:cNvPr id="13" name="">
             <a:extLst xmlns:a="http://schemas.openxmlformats.org/drawingml/2006/main">
               <a:ext uri="{FF2B5EF4-FFF2-40B4-BE49-F238E27FC236}">
-                <a16:creationId xmlns:a16="http://schemas.microsoft.com/office/drawing/2014/main" id="{761C7EB0-8020-46D5-A416-FF12F3269537}"/>
+                <a16:creationId xmlns:a16="http://schemas.microsoft.com/office/drawing/2014/main" id="{2ACAA9F9-96F8-42F2-966C-469AEB459AAA}"/>
               </a:ext>
             </a:extLst>
           </p:cNvPr>
@@ -3091,7 +3091,7 @@
     </p:spTree>
     <p:extLst>
       <p:ext uri="{BB962C8B-B14F-4D97-AF65-F5344CB8AC3E}">
-        <p14:creationId xmlns:p14="http://schemas.microsoft.com/office/powerpoint/2010/main" val="2028359300"/>
+        <p14:creationId xmlns:p14="http://schemas.microsoft.com/office/powerpoint/2010/main" val="674192103"/>
       </p:ext>
     </p:extLst>
   </p:cSld>
@@ -3292,7 +3292,7 @@
           <p:cNvPr id="19" name="">
             <a:extLst xmlns:a="http://schemas.openxmlformats.org/drawingml/2006/main">
               <a:ext uri="{FF2B5EF4-FFF2-40B4-BE49-F238E27FC236}">
-                <a16:creationId xmlns:a16="http://schemas.microsoft.com/office/drawing/2014/main" id="{B81D6B1B-5C06-48E5-A4AF-97C953F80675}"/>
+                <a16:creationId xmlns:a16="http://schemas.microsoft.com/office/drawing/2014/main" id="{381D8503-49BE-4B8B-B98C-17A5BB7E7F89}"/>
               </a:ext>
             </a:extLst>
           </p:cNvPr>
@@ -3324,7 +3324,7 @@
           <p:cNvPr id="2" name="">
             <a:extLst xmlns:a="http://schemas.openxmlformats.org/drawingml/2006/main">
               <a:ext uri="{FF2B5EF4-FFF2-40B4-BE49-F238E27FC236}">
-                <a16:creationId xmlns:a16="http://schemas.microsoft.com/office/drawing/2014/main" id="{D64A5E6F-7284-48B7-B7D5-A0F0FA52CF26}"/>
+                <a16:creationId xmlns:a16="http://schemas.microsoft.com/office/drawing/2014/main" id="{5D10300A-F9A4-4409-A788-C2192A736C69}"/>
               </a:ext>
             </a:extLst>
           </p:cNvPr>
@@ -3381,7 +3381,7 @@
           <p:cNvPr id="3" name="">
             <a:extLst xmlns:a="http://schemas.openxmlformats.org/drawingml/2006/main">
               <a:ext uri="{FF2B5EF4-FFF2-40B4-BE49-F238E27FC236}">
-                <a16:creationId xmlns:a16="http://schemas.microsoft.com/office/drawing/2014/main" id="{F1B62AE3-29D7-4754-9FA7-B15540581C6D}"/>
+                <a16:creationId xmlns:a16="http://schemas.microsoft.com/office/drawing/2014/main" id="{A09456E3-5BDF-47F7-835B-64BFC09A72F1}"/>
               </a:ext>
             </a:extLst>
           </p:cNvPr>
@@ -3413,7 +3413,7 @@
           <p:cNvPr id="4" name="">
             <a:extLst xmlns:a="http://schemas.openxmlformats.org/drawingml/2006/main">
               <a:ext uri="{FF2B5EF4-FFF2-40B4-BE49-F238E27FC236}">
-                <a16:creationId xmlns:a16="http://schemas.microsoft.com/office/drawing/2014/main" id="{5BD71304-6A64-4BE4-972D-65CD1A1C83BC}"/>
+                <a16:creationId xmlns:a16="http://schemas.microsoft.com/office/drawing/2014/main" id="{35E7971A-D6C0-46C7-819B-84619A1CED2A}"/>
               </a:ext>
             </a:extLst>
           </p:cNvPr>
@@ -3470,7 +3470,7 @@
           <p:cNvPr id="5" name="">
             <a:extLst xmlns:a="http://schemas.openxmlformats.org/drawingml/2006/main">
               <a:ext uri="{FF2B5EF4-FFF2-40B4-BE49-F238E27FC236}">
-                <a16:creationId xmlns:a16="http://schemas.microsoft.com/office/drawing/2014/main" id="{765745DA-40DC-4F02-8E67-8A2FF926BC52}"/>
+                <a16:creationId xmlns:a16="http://schemas.microsoft.com/office/drawing/2014/main" id="{87E2F81A-8542-440D-AAAE-F219562D7F54}"/>
               </a:ext>
             </a:extLst>
           </p:cNvPr>
@@ -3527,7 +3527,7 @@
           <p:cNvPr id="6" name="">
             <a:extLst xmlns:a="http://schemas.openxmlformats.org/drawingml/2006/main">
               <a:ext uri="{FF2B5EF4-FFF2-40B4-BE49-F238E27FC236}">
-                <a16:creationId xmlns:a16="http://schemas.microsoft.com/office/drawing/2014/main" id="{21711211-F4C7-4C62-970F-EA91671537FF}"/>
+                <a16:creationId xmlns:a16="http://schemas.microsoft.com/office/drawing/2014/main" id="{B172E989-98E0-468D-8621-DC0823648EBE}"/>
               </a:ext>
             </a:extLst>
           </p:cNvPr>
@@ -3584,7 +3584,7 @@
           <p:cNvPr id="7" name="">
             <a:extLst xmlns:a="http://schemas.openxmlformats.org/drawingml/2006/main">
               <a:ext uri="{FF2B5EF4-FFF2-40B4-BE49-F238E27FC236}">
-                <a16:creationId xmlns:a16="http://schemas.microsoft.com/office/drawing/2014/main" id="{4613715F-58EB-4F3C-B797-E8A0B2E0B251}"/>
+                <a16:creationId xmlns:a16="http://schemas.microsoft.com/office/drawing/2014/main" id="{D0C20CBE-EDA6-41A3-AE5E-D4B138394562}"/>
               </a:ext>
             </a:extLst>
           </p:cNvPr>
@@ -3616,7 +3616,7 @@
           <p:cNvPr id="8" name="">
             <a:extLst xmlns:a="http://schemas.openxmlformats.org/drawingml/2006/main">
               <a:ext uri="{FF2B5EF4-FFF2-40B4-BE49-F238E27FC236}">
-                <a16:creationId xmlns:a16="http://schemas.microsoft.com/office/drawing/2014/main" id="{21D57B6B-2D25-4FAD-89C2-F61D7EFB221D}"/>
+                <a16:creationId xmlns:a16="http://schemas.microsoft.com/office/drawing/2014/main" id="{42031C92-267B-4321-934F-33248ED7BF49}"/>
               </a:ext>
             </a:extLst>
           </p:cNvPr>
@@ -3673,7 +3673,7 @@
           <p:cNvPr id="9" name="">
             <a:extLst xmlns:a="http://schemas.openxmlformats.org/drawingml/2006/main">
               <a:ext uri="{FF2B5EF4-FFF2-40B4-BE49-F238E27FC236}">
-                <a16:creationId xmlns:a16="http://schemas.microsoft.com/office/drawing/2014/main" id="{F9742152-8304-4C87-94AD-7C839FA40D44}"/>
+                <a16:creationId xmlns:a16="http://schemas.microsoft.com/office/drawing/2014/main" id="{EB6EB4C3-1C23-4B3F-BFA4-BFB85D82CD3A}"/>
               </a:ext>
             </a:extLst>
           </p:cNvPr>
@@ -3730,7 +3730,7 @@
           <p:cNvPr id="10" name="">
             <a:extLst xmlns:a="http://schemas.openxmlformats.org/drawingml/2006/main">
               <a:ext uri="{FF2B5EF4-FFF2-40B4-BE49-F238E27FC236}">
-                <a16:creationId xmlns:a16="http://schemas.microsoft.com/office/drawing/2014/main" id="{63B9FFDC-BAA8-413E-84AF-F6216B768E5C}"/>
+                <a16:creationId xmlns:a16="http://schemas.microsoft.com/office/drawing/2014/main" id="{66F7F35D-5402-4D36-B801-FA4CEF198075}"/>
               </a:ext>
             </a:extLst>
           </p:cNvPr>
@@ -3787,7 +3787,7 @@
           <p:cNvPr id="11" name="">
             <a:extLst xmlns:a="http://schemas.openxmlformats.org/drawingml/2006/main">
               <a:ext uri="{FF2B5EF4-FFF2-40B4-BE49-F238E27FC236}">
-                <a16:creationId xmlns:a16="http://schemas.microsoft.com/office/drawing/2014/main" id="{445CC077-45B1-4279-A4D1-6ECC917E863C}"/>
+                <a16:creationId xmlns:a16="http://schemas.microsoft.com/office/drawing/2014/main" id="{7B2BD71C-F194-489C-9AFE-FC4FD7FACDFC}"/>
               </a:ext>
             </a:extLst>
           </p:cNvPr>
@@ -3821,7 +3821,7 @@
           <p:cNvPr id="12" name="">
             <a:extLst xmlns:a="http://schemas.openxmlformats.org/drawingml/2006/main">
               <a:ext uri="{FF2B5EF4-FFF2-40B4-BE49-F238E27FC236}">
-                <a16:creationId xmlns:a16="http://schemas.microsoft.com/office/drawing/2014/main" id="{830667FC-8681-4E9C-8C77-C8C00507E29A}"/>
+                <a16:creationId xmlns:a16="http://schemas.microsoft.com/office/drawing/2014/main" id="{EBAD870C-C72B-4102-8AA7-9F0C36C130E6}"/>
               </a:ext>
             </a:extLst>
           </p:cNvPr>
@@ -3878,7 +3878,7 @@
           <p:cNvPr id="13" name="">
             <a:extLst xmlns:a="http://schemas.openxmlformats.org/drawingml/2006/main">
               <a:ext uri="{FF2B5EF4-FFF2-40B4-BE49-F238E27FC236}">
-                <a16:creationId xmlns:a16="http://schemas.microsoft.com/office/drawing/2014/main" id="{A60AD015-9562-43A7-B7F0-66F4F30BA6F1}"/>
+                <a16:creationId xmlns:a16="http://schemas.microsoft.com/office/drawing/2014/main" id="{CE0EFFE7-DB84-4839-B871-6192A81A2E63}"/>
               </a:ext>
             </a:extLst>
           </p:cNvPr>
@@ -3935,7 +3935,7 @@
           <p:cNvPr id="14" name="">
             <a:extLst xmlns:a="http://schemas.openxmlformats.org/drawingml/2006/main">
               <a:ext uri="{FF2B5EF4-FFF2-40B4-BE49-F238E27FC236}">
-                <a16:creationId xmlns:a16="http://schemas.microsoft.com/office/drawing/2014/main" id="{F0C00B7F-E14B-40A7-83F8-BF0A94352532}"/>
+                <a16:creationId xmlns:a16="http://schemas.microsoft.com/office/drawing/2014/main" id="{C7FE0AFF-D0EE-4946-A5FC-9BEBD3E0D538}"/>
               </a:ext>
             </a:extLst>
           </p:cNvPr>
@@ -3992,7 +3992,7 @@
           <p:cNvPr id="15" name="">
             <a:extLst xmlns:a="http://schemas.openxmlformats.org/drawingml/2006/main">
               <a:ext uri="{FF2B5EF4-FFF2-40B4-BE49-F238E27FC236}">
-                <a16:creationId xmlns:a16="http://schemas.microsoft.com/office/drawing/2014/main" id="{C9CAD3DF-8DBB-4DA3-BB7D-33EDB617D54F}"/>
+                <a16:creationId xmlns:a16="http://schemas.microsoft.com/office/drawing/2014/main" id="{E4D61852-D46A-4FC3-9353-4FE209FEB88D}"/>
               </a:ext>
             </a:extLst>
           </p:cNvPr>
@@ -4026,7 +4026,7 @@
           <p:cNvPr id="16" name="">
             <a:extLst xmlns:a="http://schemas.openxmlformats.org/drawingml/2006/main">
               <a:ext uri="{FF2B5EF4-FFF2-40B4-BE49-F238E27FC236}">
-                <a16:creationId xmlns:a16="http://schemas.microsoft.com/office/drawing/2014/main" id="{95CDF149-70FE-40E3-B3CF-0FA58415F11F}"/>
+                <a16:creationId xmlns:a16="http://schemas.microsoft.com/office/drawing/2014/main" id="{0696D4E4-289F-47B3-AD0E-51B516A83055}"/>
               </a:ext>
             </a:extLst>
           </p:cNvPr>
@@ -4083,7 +4083,7 @@
           <p:cNvPr id="17" name="">
             <a:extLst xmlns:a="http://schemas.openxmlformats.org/drawingml/2006/main">
               <a:ext uri="{FF2B5EF4-FFF2-40B4-BE49-F238E27FC236}">
-                <a16:creationId xmlns:a16="http://schemas.microsoft.com/office/drawing/2014/main" id="{83F75090-2ADE-4FA8-93AE-81ED081625AF}"/>
+                <a16:creationId xmlns:a16="http://schemas.microsoft.com/office/drawing/2014/main" id="{B924F8D1-33D0-4865-949C-31F65C672855}"/>
               </a:ext>
             </a:extLst>
           </p:cNvPr>
@@ -4140,7 +4140,7 @@
           <p:cNvPr id="18" name="">
             <a:extLst xmlns:a="http://schemas.openxmlformats.org/drawingml/2006/main">
               <a:ext uri="{FF2B5EF4-FFF2-40B4-BE49-F238E27FC236}">
-                <a16:creationId xmlns:a16="http://schemas.microsoft.com/office/drawing/2014/main" id="{75C875EC-CBCC-44D9-84E5-9487B8F9B20D}"/>
+                <a16:creationId xmlns:a16="http://schemas.microsoft.com/office/drawing/2014/main" id="{0DCCD8DC-5CAB-4C3C-B7BC-27B218983C53}"/>
               </a:ext>
             </a:extLst>
           </p:cNvPr>
@@ -4195,7 +4195,7 @@
     </p:spTree>
     <p:extLst>
       <p:ext uri="{BB962C8B-B14F-4D97-AF65-F5344CB8AC3E}">
-        <p14:creationId xmlns:p14="http://schemas.microsoft.com/office/powerpoint/2010/main" val="262865316"/>
+        <p14:creationId xmlns:p14="http://schemas.microsoft.com/office/powerpoint/2010/main" val="1829579186"/>
       </p:ext>
     </p:extLst>
   </p:cSld>
@@ -4350,7 +4350,7 @@
           <p:cNvPr id="23" name="">
             <a:extLst xmlns:a="http://schemas.openxmlformats.org/drawingml/2006/main">
               <a:ext uri="{FF2B5EF4-FFF2-40B4-BE49-F238E27FC236}">
-                <a16:creationId xmlns:a16="http://schemas.microsoft.com/office/drawing/2014/main" id="{7F146BE2-8FFD-4EFD-850E-12DA4E777076}"/>
+                <a16:creationId xmlns:a16="http://schemas.microsoft.com/office/drawing/2014/main" id="{AAADB1C1-9299-434B-B7B6-6F362078FC4B}"/>
               </a:ext>
             </a:extLst>
           </p:cNvPr>
@@ -4382,7 +4382,7 @@
           <p:cNvPr id="2" name="">
             <a:extLst xmlns:a="http://schemas.openxmlformats.org/drawingml/2006/main">
               <a:ext uri="{FF2B5EF4-FFF2-40B4-BE49-F238E27FC236}">
-                <a16:creationId xmlns:a16="http://schemas.microsoft.com/office/drawing/2014/main" id="{4C38B0FF-6419-49C4-B7DD-CA9A7EABBF79}"/>
+                <a16:creationId xmlns:a16="http://schemas.microsoft.com/office/drawing/2014/main" id="{ED4B00F2-8F35-442A-8A6C-3315D545B601}"/>
               </a:ext>
             </a:extLst>
           </p:cNvPr>
@@ -4439,7 +4439,7 @@
           <p:cNvPr id="3" name="">
             <a:extLst xmlns:a="http://schemas.openxmlformats.org/drawingml/2006/main">
               <a:ext uri="{FF2B5EF4-FFF2-40B4-BE49-F238E27FC236}">
-                <a16:creationId xmlns:a16="http://schemas.microsoft.com/office/drawing/2014/main" id="{73B24BAA-73AF-4A9F-AAB3-0B09EEAB63E6}"/>
+                <a16:creationId xmlns:a16="http://schemas.microsoft.com/office/drawing/2014/main" id="{3ED8C232-1FDB-45B4-BAF6-DE57D6F428D1}"/>
               </a:ext>
             </a:extLst>
           </p:cNvPr>
@@ -4471,7 +4471,7 @@
           <p:cNvPr id="4" name="">
             <a:extLst xmlns:a="http://schemas.openxmlformats.org/drawingml/2006/main">
               <a:ext uri="{FF2B5EF4-FFF2-40B4-BE49-F238E27FC236}">
-                <a16:creationId xmlns:a16="http://schemas.microsoft.com/office/drawing/2014/main" id="{4834135C-9985-479A-85E8-C29160EF1AEC}"/>
+                <a16:creationId xmlns:a16="http://schemas.microsoft.com/office/drawing/2014/main" id="{F380FED7-206C-4F71-828B-28892108D622}"/>
               </a:ext>
             </a:extLst>
           </p:cNvPr>
@@ -4528,7 +4528,7 @@
           <p:cNvPr id="5" name="">
             <a:extLst xmlns:a="http://schemas.openxmlformats.org/drawingml/2006/main">
               <a:ext uri="{FF2B5EF4-FFF2-40B4-BE49-F238E27FC236}">
-                <a16:creationId xmlns:a16="http://schemas.microsoft.com/office/drawing/2014/main" id="{AA913529-75A6-4F25-A30E-F6B727581DDF}"/>
+                <a16:creationId xmlns:a16="http://schemas.microsoft.com/office/drawing/2014/main" id="{048FE162-BB77-4A90-8E2E-A20675255AAB}"/>
               </a:ext>
             </a:extLst>
           </p:cNvPr>
@@ -4585,7 +4585,7 @@
           <p:cNvPr id="6" name="">
             <a:extLst xmlns:a="http://schemas.openxmlformats.org/drawingml/2006/main">
               <a:ext uri="{FF2B5EF4-FFF2-40B4-BE49-F238E27FC236}">
-                <a16:creationId xmlns:a16="http://schemas.microsoft.com/office/drawing/2014/main" id="{329D76D2-A819-45CA-904A-F0E430696051}"/>
+                <a16:creationId xmlns:a16="http://schemas.microsoft.com/office/drawing/2014/main" id="{F88542C9-1F0F-41F2-B08A-099F3712C1F9}"/>
               </a:ext>
             </a:extLst>
           </p:cNvPr>
@@ -4642,7 +4642,7 @@
           <p:cNvPr id="7" name="">
             <a:extLst xmlns:a="http://schemas.openxmlformats.org/drawingml/2006/main">
               <a:ext uri="{FF2B5EF4-FFF2-40B4-BE49-F238E27FC236}">
-                <a16:creationId xmlns:a16="http://schemas.microsoft.com/office/drawing/2014/main" id="{80CCEA8A-40BE-4F9B-B092-D98D3DC0051A}"/>
+                <a16:creationId xmlns:a16="http://schemas.microsoft.com/office/drawing/2014/main" id="{41017C3D-CF39-48FA-8E24-0988D47538DD}"/>
               </a:ext>
             </a:extLst>
           </p:cNvPr>
@@ -4674,7 +4674,7 @@
           <p:cNvPr id="8" name="">
             <a:extLst xmlns:a="http://schemas.openxmlformats.org/drawingml/2006/main">
               <a:ext uri="{FF2B5EF4-FFF2-40B4-BE49-F238E27FC236}">
-                <a16:creationId xmlns:a16="http://schemas.microsoft.com/office/drawing/2014/main" id="{A3F1B2AF-46AA-4D95-A129-D7B54135A0F7}"/>
+                <a16:creationId xmlns:a16="http://schemas.microsoft.com/office/drawing/2014/main" id="{CB50B03B-D1C3-40FF-A90D-B94AF86298DE}"/>
               </a:ext>
             </a:extLst>
           </p:cNvPr>
@@ -4731,7 +4731,7 @@
           <p:cNvPr id="9" name="">
             <a:extLst xmlns:a="http://schemas.openxmlformats.org/drawingml/2006/main">
               <a:ext uri="{FF2B5EF4-FFF2-40B4-BE49-F238E27FC236}">
-                <a16:creationId xmlns:a16="http://schemas.microsoft.com/office/drawing/2014/main" id="{2303F9D7-AB68-49A2-AC5E-A214C3228784}"/>
+                <a16:creationId xmlns:a16="http://schemas.microsoft.com/office/drawing/2014/main" id="{729F98E3-162D-4537-908B-34460EE1BE49}"/>
               </a:ext>
             </a:extLst>
           </p:cNvPr>
@@ -4788,7 +4788,7 @@
           <p:cNvPr id="10" name="">
             <a:extLst xmlns:a="http://schemas.openxmlformats.org/drawingml/2006/main">
               <a:ext uri="{FF2B5EF4-FFF2-40B4-BE49-F238E27FC236}">
-                <a16:creationId xmlns:a16="http://schemas.microsoft.com/office/drawing/2014/main" id="{5F8A75AE-C954-41DA-9528-8C842B8A03B1}"/>
+                <a16:creationId xmlns:a16="http://schemas.microsoft.com/office/drawing/2014/main" id="{875FDCED-EBA0-41F1-8A65-7ECE71AF4BFD}"/>
               </a:ext>
             </a:extLst>
           </p:cNvPr>
@@ -4822,7 +4822,7 @@
           <p:cNvPr id="11" name="">
             <a:extLst xmlns:a="http://schemas.openxmlformats.org/drawingml/2006/main">
               <a:ext uri="{FF2B5EF4-FFF2-40B4-BE49-F238E27FC236}">
-                <a16:creationId xmlns:a16="http://schemas.microsoft.com/office/drawing/2014/main" id="{3276753C-EC94-4D41-A38C-A3FDA4464F4F}"/>
+                <a16:creationId xmlns:a16="http://schemas.microsoft.com/office/drawing/2014/main" id="{997C8AF7-6D54-4735-B7EE-59E030102220}"/>
               </a:ext>
             </a:extLst>
           </p:cNvPr>
@@ -4854,7 +4854,7 @@
           <p:cNvPr id="12" name="">
             <a:extLst xmlns:a="http://schemas.openxmlformats.org/drawingml/2006/main">
               <a:ext uri="{FF2B5EF4-FFF2-40B4-BE49-F238E27FC236}">
-                <a16:creationId xmlns:a16="http://schemas.microsoft.com/office/drawing/2014/main" id="{97094415-384C-4B5C-9746-6C85F844FF30}"/>
+                <a16:creationId xmlns:a16="http://schemas.microsoft.com/office/drawing/2014/main" id="{1F063D6E-C6CF-44D2-B1A9-C2D565AB8C47}"/>
               </a:ext>
             </a:extLst>
           </p:cNvPr>
@@ -4911,7 +4911,7 @@
           <p:cNvPr id="13" name="">
             <a:extLst xmlns:a="http://schemas.openxmlformats.org/drawingml/2006/main">
               <a:ext uri="{FF2B5EF4-FFF2-40B4-BE49-F238E27FC236}">
-                <a16:creationId xmlns:a16="http://schemas.microsoft.com/office/drawing/2014/main" id="{E7B16044-F09C-426F-8AE5-9BB5ADFEF985}"/>
+                <a16:creationId xmlns:a16="http://schemas.microsoft.com/office/drawing/2014/main" id="{02D0A743-B69C-43DE-9C22-C76A62BD6F73}"/>
               </a:ext>
             </a:extLst>
           </p:cNvPr>
@@ -4968,7 +4968,7 @@
           <p:cNvPr id="14" name="">
             <a:extLst xmlns:a="http://schemas.openxmlformats.org/drawingml/2006/main">
               <a:ext uri="{FF2B5EF4-FFF2-40B4-BE49-F238E27FC236}">
-                <a16:creationId xmlns:a16="http://schemas.microsoft.com/office/drawing/2014/main" id="{22AC9A14-C16B-4ED7-B266-EFD79E104B71}"/>
+                <a16:creationId xmlns:a16="http://schemas.microsoft.com/office/drawing/2014/main" id="{E637A133-A876-44BA-BF9A-ED1F76A04BAD}"/>
               </a:ext>
             </a:extLst>
           </p:cNvPr>
@@ -5002,7 +5002,7 @@
           <p:cNvPr id="15" name="">
             <a:extLst xmlns:a="http://schemas.openxmlformats.org/drawingml/2006/main">
               <a:ext uri="{FF2B5EF4-FFF2-40B4-BE49-F238E27FC236}">
-                <a16:creationId xmlns:a16="http://schemas.microsoft.com/office/drawing/2014/main" id="{5ECA48C1-7935-4793-9760-776A1F72CE22}"/>
+                <a16:creationId xmlns:a16="http://schemas.microsoft.com/office/drawing/2014/main" id="{A73B556B-1BF9-4BA5-BBF8-2FE3F513A6F4}"/>
               </a:ext>
             </a:extLst>
           </p:cNvPr>
@@ -5034,7 +5034,7 @@
           <p:cNvPr id="16" name="">
             <a:extLst xmlns:a="http://schemas.openxmlformats.org/drawingml/2006/main">
               <a:ext uri="{FF2B5EF4-FFF2-40B4-BE49-F238E27FC236}">
-                <a16:creationId xmlns:a16="http://schemas.microsoft.com/office/drawing/2014/main" id="{1683724C-DF03-4362-8180-EE876B718666}"/>
+                <a16:creationId xmlns:a16="http://schemas.microsoft.com/office/drawing/2014/main" id="{ABD40FB7-3C38-4FD1-9123-85278BED0C29}"/>
               </a:ext>
             </a:extLst>
           </p:cNvPr>
@@ -5091,7 +5091,7 @@
           <p:cNvPr id="17" name="">
             <a:extLst xmlns:a="http://schemas.openxmlformats.org/drawingml/2006/main">
               <a:ext uri="{FF2B5EF4-FFF2-40B4-BE49-F238E27FC236}">
-                <a16:creationId xmlns:a16="http://schemas.microsoft.com/office/drawing/2014/main" id="{06DAE445-4258-41B0-AA60-A71E92396733}"/>
+                <a16:creationId xmlns:a16="http://schemas.microsoft.com/office/drawing/2014/main" id="{10622182-81AB-4FC0-BBE2-F7EE7DBA9DD7}"/>
               </a:ext>
             </a:extLst>
           </p:cNvPr>
@@ -5148,7 +5148,7 @@
           <p:cNvPr id="18" name="">
             <a:extLst xmlns:a="http://schemas.openxmlformats.org/drawingml/2006/main">
               <a:ext uri="{FF2B5EF4-FFF2-40B4-BE49-F238E27FC236}">
-                <a16:creationId xmlns:a16="http://schemas.microsoft.com/office/drawing/2014/main" id="{A74399B6-40C6-485E-A8DA-1A17B0EF9921}"/>
+                <a16:creationId xmlns:a16="http://schemas.microsoft.com/office/drawing/2014/main" id="{5DA06CA6-B1F8-45A8-8C12-07298385C7BD}"/>
               </a:ext>
             </a:extLst>
           </p:cNvPr>
@@ -5182,7 +5182,7 @@
           <p:cNvPr id="19" name="">
             <a:extLst xmlns:a="http://schemas.openxmlformats.org/drawingml/2006/main">
               <a:ext uri="{FF2B5EF4-FFF2-40B4-BE49-F238E27FC236}">
-                <a16:creationId xmlns:a16="http://schemas.microsoft.com/office/drawing/2014/main" id="{38B795FD-16EB-46B8-A82A-2A1492B23E47}"/>
+                <a16:creationId xmlns:a16="http://schemas.microsoft.com/office/drawing/2014/main" id="{8C6298A5-9F10-48AF-9709-D70257EB0DAE}"/>
               </a:ext>
             </a:extLst>
           </p:cNvPr>
@@ -5214,7 +5214,7 @@
           <p:cNvPr id="20" name="">
             <a:extLst xmlns:a="http://schemas.openxmlformats.org/drawingml/2006/main">
               <a:ext uri="{FF2B5EF4-FFF2-40B4-BE49-F238E27FC236}">
-                <a16:creationId xmlns:a16="http://schemas.microsoft.com/office/drawing/2014/main" id="{31B9CAD6-2688-4EA1-9FD9-020C3C07DB68}"/>
+                <a16:creationId xmlns:a16="http://schemas.microsoft.com/office/drawing/2014/main" id="{B6E6D95F-64F9-4E55-8381-004CBBE967AC}"/>
               </a:ext>
             </a:extLst>
           </p:cNvPr>
@@ -5271,7 +5271,7 @@
           <p:cNvPr id="21" name="">
             <a:extLst xmlns:a="http://schemas.openxmlformats.org/drawingml/2006/main">
               <a:ext uri="{FF2B5EF4-FFF2-40B4-BE49-F238E27FC236}">
-                <a16:creationId xmlns:a16="http://schemas.microsoft.com/office/drawing/2014/main" id="{5422AF18-39F4-466F-9AED-82E57AB151F9}"/>
+                <a16:creationId xmlns:a16="http://schemas.microsoft.com/office/drawing/2014/main" id="{2244C0F2-12D6-47AF-AF73-C574F5A12D2C}"/>
               </a:ext>
             </a:extLst>
           </p:cNvPr>
@@ -5328,7 +5328,7 @@
           <p:cNvPr id="22" name="">
             <a:extLst xmlns:a="http://schemas.openxmlformats.org/drawingml/2006/main">
               <a:ext uri="{FF2B5EF4-FFF2-40B4-BE49-F238E27FC236}">
-                <a16:creationId xmlns:a16="http://schemas.microsoft.com/office/drawing/2014/main" id="{8816D099-FE1F-49AD-9741-F65A8FE3E07C}"/>
+                <a16:creationId xmlns:a16="http://schemas.microsoft.com/office/drawing/2014/main" id="{83D7236F-27F2-4D44-8194-4D715718B5A0}"/>
               </a:ext>
             </a:extLst>
           </p:cNvPr>
@@ -5383,7 +5383,7 @@
     </p:spTree>
     <p:extLst>
       <p:ext uri="{BB962C8B-B14F-4D97-AF65-F5344CB8AC3E}">
-        <p14:creationId xmlns:p14="http://schemas.microsoft.com/office/powerpoint/2010/main" val="952540318"/>
+        <p14:creationId xmlns:p14="http://schemas.microsoft.com/office/powerpoint/2010/main" val="1251129630"/>
       </p:ext>
     </p:extLst>
   </p:cSld>
@@ -5584,7 +5584,7 @@
           <p:cNvPr id="23" name="">
             <a:extLst xmlns:a="http://schemas.openxmlformats.org/drawingml/2006/main">
               <a:ext uri="{FF2B5EF4-FFF2-40B4-BE49-F238E27FC236}">
-                <a16:creationId xmlns:a16="http://schemas.microsoft.com/office/drawing/2014/main" id="{65E82355-D219-4263-B18D-E1044C6896CD}"/>
+                <a16:creationId xmlns:a16="http://schemas.microsoft.com/office/drawing/2014/main" id="{04244BF3-4280-4CBD-980E-BDE62403B144}"/>
               </a:ext>
             </a:extLst>
           </p:cNvPr>
@@ -5616,7 +5616,7 @@
           <p:cNvPr id="2" name="">
             <a:extLst xmlns:a="http://schemas.openxmlformats.org/drawingml/2006/main">
               <a:ext uri="{FF2B5EF4-FFF2-40B4-BE49-F238E27FC236}">
-                <a16:creationId xmlns:a16="http://schemas.microsoft.com/office/drawing/2014/main" id="{C57A1485-14D1-4FDE-9F11-8EE30824942C}"/>
+                <a16:creationId xmlns:a16="http://schemas.microsoft.com/office/drawing/2014/main" id="{6C16C7B4-4DE0-4BDB-A655-85637D762628}"/>
               </a:ext>
             </a:extLst>
           </p:cNvPr>
@@ -5673,7 +5673,7 @@
           <p:cNvPr id="3" name="">
             <a:extLst xmlns:a="http://schemas.openxmlformats.org/drawingml/2006/main">
               <a:ext uri="{FF2B5EF4-FFF2-40B4-BE49-F238E27FC236}">
-                <a16:creationId xmlns:a16="http://schemas.microsoft.com/office/drawing/2014/main" id="{71C4F81D-A207-4B43-8B03-8CA759B3D1DF}"/>
+                <a16:creationId xmlns:a16="http://schemas.microsoft.com/office/drawing/2014/main" id="{44786403-C938-4FCE-A0E3-2434DA1FD43F}"/>
               </a:ext>
             </a:extLst>
           </p:cNvPr>
@@ -5705,7 +5705,7 @@
           <p:cNvPr id="4" name="">
             <a:extLst xmlns:a="http://schemas.openxmlformats.org/drawingml/2006/main">
               <a:ext uri="{FF2B5EF4-FFF2-40B4-BE49-F238E27FC236}">
-                <a16:creationId xmlns:a16="http://schemas.microsoft.com/office/drawing/2014/main" id="{0B4A218F-8A07-457E-893E-D4355D067623}"/>
+                <a16:creationId xmlns:a16="http://schemas.microsoft.com/office/drawing/2014/main" id="{1D448035-2938-40B4-86BE-4F8F525992D6}"/>
               </a:ext>
             </a:extLst>
           </p:cNvPr>
@@ -5762,7 +5762,7 @@
           <p:cNvPr id="5" name="">
             <a:extLst xmlns:a="http://schemas.openxmlformats.org/drawingml/2006/main">
               <a:ext uri="{FF2B5EF4-FFF2-40B4-BE49-F238E27FC236}">
-                <a16:creationId xmlns:a16="http://schemas.microsoft.com/office/drawing/2014/main" id="{C3409FCB-D98D-458E-9C6D-243AA089EE41}"/>
+                <a16:creationId xmlns:a16="http://schemas.microsoft.com/office/drawing/2014/main" id="{E8B7B15A-2FA1-426D-9D58-5B7F34A1BEFD}"/>
               </a:ext>
             </a:extLst>
           </p:cNvPr>
@@ -5819,7 +5819,7 @@
           <p:cNvPr id="6" name="">
             <a:extLst xmlns:a="http://schemas.openxmlformats.org/drawingml/2006/main">
               <a:ext uri="{FF2B5EF4-FFF2-40B4-BE49-F238E27FC236}">
-                <a16:creationId xmlns:a16="http://schemas.microsoft.com/office/drawing/2014/main" id="{A2699F24-DE90-42D1-B6DA-CD52F2B75A8F}"/>
+                <a16:creationId xmlns:a16="http://schemas.microsoft.com/office/drawing/2014/main" id="{B3CCCA20-8030-4B6C-A995-7D7BB74C61D5}"/>
               </a:ext>
             </a:extLst>
           </p:cNvPr>
@@ -5876,7 +5876,7 @@
           <p:cNvPr id="7" name="">
             <a:extLst xmlns:a="http://schemas.openxmlformats.org/drawingml/2006/main">
               <a:ext uri="{FF2B5EF4-FFF2-40B4-BE49-F238E27FC236}">
-                <a16:creationId xmlns:a16="http://schemas.microsoft.com/office/drawing/2014/main" id="{259C6809-843C-45D8-AAAB-29DB5C50E0EB}"/>
+                <a16:creationId xmlns:a16="http://schemas.microsoft.com/office/drawing/2014/main" id="{B973A834-C4CF-468B-B08C-D20EE02C1F1F}"/>
               </a:ext>
             </a:extLst>
           </p:cNvPr>
@@ -5908,7 +5908,7 @@
           <p:cNvPr id="8" name="">
             <a:extLst xmlns:a="http://schemas.openxmlformats.org/drawingml/2006/main">
               <a:ext uri="{FF2B5EF4-FFF2-40B4-BE49-F238E27FC236}">
-                <a16:creationId xmlns:a16="http://schemas.microsoft.com/office/drawing/2014/main" id="{CAD1B8FD-F883-4509-AC7B-70DCC6DEB52C}"/>
+                <a16:creationId xmlns:a16="http://schemas.microsoft.com/office/drawing/2014/main" id="{4E49EE2B-5E28-4DD9-81F1-03549B4B91C8}"/>
               </a:ext>
             </a:extLst>
           </p:cNvPr>
@@ -5965,7 +5965,7 @@
           <p:cNvPr id="9" name="">
             <a:extLst xmlns:a="http://schemas.openxmlformats.org/drawingml/2006/main">
               <a:ext uri="{FF2B5EF4-FFF2-40B4-BE49-F238E27FC236}">
-                <a16:creationId xmlns:a16="http://schemas.microsoft.com/office/drawing/2014/main" id="{17CA640D-9C41-4C03-BAAD-B2B7B762717E}"/>
+                <a16:creationId xmlns:a16="http://schemas.microsoft.com/office/drawing/2014/main" id="{5270732C-42C7-4839-8DFF-4911F8D5B69C}"/>
               </a:ext>
             </a:extLst>
           </p:cNvPr>
@@ -6022,7 +6022,7 @@
           <p:cNvPr id="10" name="">
             <a:extLst xmlns:a="http://schemas.openxmlformats.org/drawingml/2006/main">
               <a:ext uri="{FF2B5EF4-FFF2-40B4-BE49-F238E27FC236}">
-                <a16:creationId xmlns:a16="http://schemas.microsoft.com/office/drawing/2014/main" id="{FDFBBB1F-C96D-4BA3-834A-EA375D2240A0}"/>
+                <a16:creationId xmlns:a16="http://schemas.microsoft.com/office/drawing/2014/main" id="{5A567FE1-914D-401A-9354-1F1B4C03D50C}"/>
               </a:ext>
             </a:extLst>
           </p:cNvPr>
@@ -6056,7 +6056,7 @@
           <p:cNvPr id="11" name="">
             <a:extLst xmlns:a="http://schemas.openxmlformats.org/drawingml/2006/main">
               <a:ext uri="{FF2B5EF4-FFF2-40B4-BE49-F238E27FC236}">
-                <a16:creationId xmlns:a16="http://schemas.microsoft.com/office/drawing/2014/main" id="{E400EB09-963D-4E40-B4CF-DAC9A4B5BB31}"/>
+                <a16:creationId xmlns:a16="http://schemas.microsoft.com/office/drawing/2014/main" id="{33AE329E-E711-4F1D-A658-7F2F48FD0D28}"/>
               </a:ext>
             </a:extLst>
           </p:cNvPr>
@@ -6088,7 +6088,7 @@
           <p:cNvPr id="12" name="">
             <a:extLst xmlns:a="http://schemas.openxmlformats.org/drawingml/2006/main">
               <a:ext uri="{FF2B5EF4-FFF2-40B4-BE49-F238E27FC236}">
-                <a16:creationId xmlns:a16="http://schemas.microsoft.com/office/drawing/2014/main" id="{560B5ADA-E9DA-4487-A244-3DC117D37FF0}"/>
+                <a16:creationId xmlns:a16="http://schemas.microsoft.com/office/drawing/2014/main" id="{FAB8FECD-1A00-4054-91C7-A9223C4AEF56}"/>
               </a:ext>
             </a:extLst>
           </p:cNvPr>
@@ -6145,7 +6145,7 @@
           <p:cNvPr id="13" name="">
             <a:extLst xmlns:a="http://schemas.openxmlformats.org/drawingml/2006/main">
               <a:ext uri="{FF2B5EF4-FFF2-40B4-BE49-F238E27FC236}">
-                <a16:creationId xmlns:a16="http://schemas.microsoft.com/office/drawing/2014/main" id="{96C3497C-9600-4E06-97FE-ADBAC8C76CF2}"/>
+                <a16:creationId xmlns:a16="http://schemas.microsoft.com/office/drawing/2014/main" id="{015BFFBD-B2A1-4457-A626-B3A53121D5C4}"/>
               </a:ext>
             </a:extLst>
           </p:cNvPr>
@@ -6202,7 +6202,7 @@
           <p:cNvPr id="14" name="">
             <a:extLst xmlns:a="http://schemas.openxmlformats.org/drawingml/2006/main">
               <a:ext uri="{FF2B5EF4-FFF2-40B4-BE49-F238E27FC236}">
-                <a16:creationId xmlns:a16="http://schemas.microsoft.com/office/drawing/2014/main" id="{27223DE1-279F-4A8A-964D-0D4297DF15C7}"/>
+                <a16:creationId xmlns:a16="http://schemas.microsoft.com/office/drawing/2014/main" id="{9983366D-EB34-46E8-A67C-48F207B30565}"/>
               </a:ext>
             </a:extLst>
           </p:cNvPr>
@@ -6236,7 +6236,7 @@
           <p:cNvPr id="15" name="">
             <a:extLst xmlns:a="http://schemas.openxmlformats.org/drawingml/2006/main">
               <a:ext uri="{FF2B5EF4-FFF2-40B4-BE49-F238E27FC236}">
-                <a16:creationId xmlns:a16="http://schemas.microsoft.com/office/drawing/2014/main" id="{7CE9BAF9-7981-4AEF-9E2C-CDC2B61A6767}"/>
+                <a16:creationId xmlns:a16="http://schemas.microsoft.com/office/drawing/2014/main" id="{41638116-D21C-4E65-8A67-8B7DAAFDAB32}"/>
               </a:ext>
             </a:extLst>
           </p:cNvPr>
@@ -6268,7 +6268,7 @@
           <p:cNvPr id="16" name="">
             <a:extLst xmlns:a="http://schemas.openxmlformats.org/drawingml/2006/main">
               <a:ext uri="{FF2B5EF4-FFF2-40B4-BE49-F238E27FC236}">
-                <a16:creationId xmlns:a16="http://schemas.microsoft.com/office/drawing/2014/main" id="{4B733F83-3CEA-4941-92B6-1941E25DA1F6}"/>
+                <a16:creationId xmlns:a16="http://schemas.microsoft.com/office/drawing/2014/main" id="{81217F7D-023A-466C-908E-F4F3551835EA}"/>
               </a:ext>
             </a:extLst>
           </p:cNvPr>
@@ -6325,7 +6325,7 @@
           <p:cNvPr id="17" name="">
             <a:extLst xmlns:a="http://schemas.openxmlformats.org/drawingml/2006/main">
               <a:ext uri="{FF2B5EF4-FFF2-40B4-BE49-F238E27FC236}">
-                <a16:creationId xmlns:a16="http://schemas.microsoft.com/office/drawing/2014/main" id="{96198232-EF15-4C1D-BB6C-8DC877AA582B}"/>
+                <a16:creationId xmlns:a16="http://schemas.microsoft.com/office/drawing/2014/main" id="{D74AF4E7-4625-464C-8CB3-4576A216DB9F}"/>
               </a:ext>
             </a:extLst>
           </p:cNvPr>
@@ -6382,7 +6382,7 @@
           <p:cNvPr id="18" name="">
             <a:extLst xmlns:a="http://schemas.openxmlformats.org/drawingml/2006/main">
               <a:ext uri="{FF2B5EF4-FFF2-40B4-BE49-F238E27FC236}">
-                <a16:creationId xmlns:a16="http://schemas.microsoft.com/office/drawing/2014/main" id="{E822208A-36B7-4383-A4FA-56BE7CBD8498}"/>
+                <a16:creationId xmlns:a16="http://schemas.microsoft.com/office/drawing/2014/main" id="{DCE690ED-DF1D-4D77-910B-2C5E7B054885}"/>
               </a:ext>
             </a:extLst>
           </p:cNvPr>
@@ -6416,7 +6416,7 @@
           <p:cNvPr id="19" name="">
             <a:extLst xmlns:a="http://schemas.openxmlformats.org/drawingml/2006/main">
               <a:ext uri="{FF2B5EF4-FFF2-40B4-BE49-F238E27FC236}">
-                <a16:creationId xmlns:a16="http://schemas.microsoft.com/office/drawing/2014/main" id="{74A8F768-FE38-415A-933F-F35FDDE514F5}"/>
+                <a16:creationId xmlns:a16="http://schemas.microsoft.com/office/drawing/2014/main" id="{EACC7E28-2B3A-4878-B9DC-2BEC54A4336E}"/>
               </a:ext>
             </a:extLst>
           </p:cNvPr>
@@ -6448,7 +6448,7 @@
           <p:cNvPr id="20" name="">
             <a:extLst xmlns:a="http://schemas.openxmlformats.org/drawingml/2006/main">
               <a:ext uri="{FF2B5EF4-FFF2-40B4-BE49-F238E27FC236}">
-                <a16:creationId xmlns:a16="http://schemas.microsoft.com/office/drawing/2014/main" id="{82A050DC-27A7-4945-B3DE-F18662DDC83C}"/>
+                <a16:creationId xmlns:a16="http://schemas.microsoft.com/office/drawing/2014/main" id="{3974A83D-83C1-4E54-B43C-27388FB732E8}"/>
               </a:ext>
             </a:extLst>
           </p:cNvPr>
@@ -6505,7 +6505,7 @@
           <p:cNvPr id="21" name="">
             <a:extLst xmlns:a="http://schemas.openxmlformats.org/drawingml/2006/main">
               <a:ext uri="{FF2B5EF4-FFF2-40B4-BE49-F238E27FC236}">
-                <a16:creationId xmlns:a16="http://schemas.microsoft.com/office/drawing/2014/main" id="{096FB562-DC5C-4F1F-AB78-5C65FFE1DF9A}"/>
+                <a16:creationId xmlns:a16="http://schemas.microsoft.com/office/drawing/2014/main" id="{0BA3A170-9FD2-46E9-817A-87B02D5CF0ED}"/>
               </a:ext>
             </a:extLst>
           </p:cNvPr>
@@ -6562,7 +6562,7 @@
           <p:cNvPr id="22" name="">
             <a:extLst xmlns:a="http://schemas.openxmlformats.org/drawingml/2006/main">
               <a:ext uri="{FF2B5EF4-FFF2-40B4-BE49-F238E27FC236}">
-                <a16:creationId xmlns:a16="http://schemas.microsoft.com/office/drawing/2014/main" id="{11091E63-30E8-4D21-B3D2-217A411E835E}"/>
+                <a16:creationId xmlns:a16="http://schemas.microsoft.com/office/drawing/2014/main" id="{1ED6B6F4-5D31-4B9F-BDF5-A71449B47DB8}"/>
               </a:ext>
             </a:extLst>
           </p:cNvPr>
@@ -6617,7 +6617,7 @@
     </p:spTree>
     <p:extLst>
       <p:ext uri="{BB962C8B-B14F-4D97-AF65-F5344CB8AC3E}">
-        <p14:creationId xmlns:p14="http://schemas.microsoft.com/office/powerpoint/2010/main" val="1755730939"/>
+        <p14:creationId xmlns:p14="http://schemas.microsoft.com/office/powerpoint/2010/main" val="1973413705"/>
       </p:ext>
     </p:extLst>
   </p:cSld>
@@ -6818,7 +6818,7 @@
           <p:cNvPr id="16" name="">
             <a:extLst xmlns:a="http://schemas.openxmlformats.org/drawingml/2006/main">
               <a:ext uri="{FF2B5EF4-FFF2-40B4-BE49-F238E27FC236}">
-                <a16:creationId xmlns:a16="http://schemas.microsoft.com/office/drawing/2014/main" id="{8E37CA1F-F52C-4CF3-971C-7A37C28BF0E6}"/>
+                <a16:creationId xmlns:a16="http://schemas.microsoft.com/office/drawing/2014/main" id="{C3506F1B-375E-45DC-A28C-1A76ADBEEC74}"/>
               </a:ext>
             </a:extLst>
           </p:cNvPr>
@@ -6850,7 +6850,7 @@
           <p:cNvPr id="2" name="">
             <a:extLst xmlns:a="http://schemas.openxmlformats.org/drawingml/2006/main">
               <a:ext uri="{FF2B5EF4-FFF2-40B4-BE49-F238E27FC236}">
-                <a16:creationId xmlns:a16="http://schemas.microsoft.com/office/drawing/2014/main" id="{25F4DDA0-D1E5-49EE-A5C3-3260D2018EB1}"/>
+                <a16:creationId xmlns:a16="http://schemas.microsoft.com/office/drawing/2014/main" id="{AC48AF57-88E7-4E61-BD0F-B6511FA673F9}"/>
               </a:ext>
             </a:extLst>
           </p:cNvPr>
@@ -6907,7 +6907,7 @@
           <p:cNvPr id="3" name="">
             <a:extLst xmlns:a="http://schemas.openxmlformats.org/drawingml/2006/main">
               <a:ext uri="{FF2B5EF4-FFF2-40B4-BE49-F238E27FC236}">
-                <a16:creationId xmlns:a16="http://schemas.microsoft.com/office/drawing/2014/main" id="{32953C9E-080D-43BF-BF45-3998A15C0D30}"/>
+                <a16:creationId xmlns:a16="http://schemas.microsoft.com/office/drawing/2014/main" id="{D0D64F8C-13FC-4906-9643-8CD6B461F5A2}"/>
               </a:ext>
             </a:extLst>
           </p:cNvPr>
@@ -6939,7 +6939,7 @@
           <p:cNvPr id="4" name="">
             <a:extLst xmlns:a="http://schemas.openxmlformats.org/drawingml/2006/main">
               <a:ext uri="{FF2B5EF4-FFF2-40B4-BE49-F238E27FC236}">
-                <a16:creationId xmlns:a16="http://schemas.microsoft.com/office/drawing/2014/main" id="{748A22B0-8666-40E9-BC85-8720D2ED42C2}"/>
+                <a16:creationId xmlns:a16="http://schemas.microsoft.com/office/drawing/2014/main" id="{0F18385C-9F54-4DFA-BACE-872FA81B6DFE}"/>
               </a:ext>
             </a:extLst>
           </p:cNvPr>
@@ -6996,7 +6996,7 @@
           <p:cNvPr id="5" name="">
             <a:extLst xmlns:a="http://schemas.openxmlformats.org/drawingml/2006/main">
               <a:ext uri="{FF2B5EF4-FFF2-40B4-BE49-F238E27FC236}">
-                <a16:creationId xmlns:a16="http://schemas.microsoft.com/office/drawing/2014/main" id="{28EF502A-A86A-4262-807E-1BE4265AF8B4}"/>
+                <a16:creationId xmlns:a16="http://schemas.microsoft.com/office/drawing/2014/main" id="{FE829B51-56C1-46FB-9754-EC675E3A030B}"/>
               </a:ext>
             </a:extLst>
           </p:cNvPr>
@@ -7053,7 +7053,7 @@
           <p:cNvPr id="6" name="">
             <a:extLst xmlns:a="http://schemas.openxmlformats.org/drawingml/2006/main">
               <a:ext uri="{FF2B5EF4-FFF2-40B4-BE49-F238E27FC236}">
-                <a16:creationId xmlns:a16="http://schemas.microsoft.com/office/drawing/2014/main" id="{8FD9D4C7-566B-413C-B297-78018A6A70F6}"/>
+                <a16:creationId xmlns:a16="http://schemas.microsoft.com/office/drawing/2014/main" id="{6BF24BD7-EA5A-4F79-93DD-85FA05328441}"/>
               </a:ext>
             </a:extLst>
           </p:cNvPr>
@@ -7110,7 +7110,7 @@
           <p:cNvPr id="7" name="">
             <a:extLst xmlns:a="http://schemas.openxmlformats.org/drawingml/2006/main">
               <a:ext uri="{FF2B5EF4-FFF2-40B4-BE49-F238E27FC236}">
-                <a16:creationId xmlns:a16="http://schemas.microsoft.com/office/drawing/2014/main" id="{92D7D869-34DD-4830-9C0D-7CA41E7C45A2}"/>
+                <a16:creationId xmlns:a16="http://schemas.microsoft.com/office/drawing/2014/main" id="{D37FF2EB-18CB-458F-BFCB-A5726EC429B0}"/>
               </a:ext>
             </a:extLst>
           </p:cNvPr>
@@ -7142,7 +7142,7 @@
           <p:cNvPr id="8" name="">
             <a:extLst xmlns:a="http://schemas.openxmlformats.org/drawingml/2006/main">
               <a:ext uri="{FF2B5EF4-FFF2-40B4-BE49-F238E27FC236}">
-                <a16:creationId xmlns:a16="http://schemas.microsoft.com/office/drawing/2014/main" id="{3EE84D11-EE47-46EB-9844-1DBF967D24AD}"/>
+                <a16:creationId xmlns:a16="http://schemas.microsoft.com/office/drawing/2014/main" id="{6BC5B158-3103-4A26-897F-BBB9CCB96F1F}"/>
               </a:ext>
             </a:extLst>
           </p:cNvPr>
@@ -7199,7 +7199,7 @@
           <p:cNvPr id="9" name="">
             <a:extLst xmlns:a="http://schemas.openxmlformats.org/drawingml/2006/main">
               <a:ext uri="{FF2B5EF4-FFF2-40B4-BE49-F238E27FC236}">
-                <a16:creationId xmlns:a16="http://schemas.microsoft.com/office/drawing/2014/main" id="{BC83357A-6045-4018-A817-C07380DA4867}"/>
+                <a16:creationId xmlns:a16="http://schemas.microsoft.com/office/drawing/2014/main" id="{86A197EB-C13C-42CF-AD46-C639ACBF4DA2}"/>
               </a:ext>
             </a:extLst>
           </p:cNvPr>
@@ -7256,7 +7256,7 @@
           <p:cNvPr id="10" name="">
             <a:extLst xmlns:a="http://schemas.openxmlformats.org/drawingml/2006/main">
               <a:ext uri="{FF2B5EF4-FFF2-40B4-BE49-F238E27FC236}">
-                <a16:creationId xmlns:a16="http://schemas.microsoft.com/office/drawing/2014/main" id="{21A3B038-9DFB-4CDB-8915-CBA8F1B0225D}"/>
+                <a16:creationId xmlns:a16="http://schemas.microsoft.com/office/drawing/2014/main" id="{A1A4BBD7-EA88-4620-AC9C-0921A67C0D1A}"/>
               </a:ext>
             </a:extLst>
           </p:cNvPr>
@@ -7313,7 +7313,7 @@
           <p:cNvPr id="11" name="">
             <a:extLst xmlns:a="http://schemas.openxmlformats.org/drawingml/2006/main">
               <a:ext uri="{FF2B5EF4-FFF2-40B4-BE49-F238E27FC236}">
-                <a16:creationId xmlns:a16="http://schemas.microsoft.com/office/drawing/2014/main" id="{8229D5C7-C82F-4E2E-89B1-200C6B5AB61F}"/>
+                <a16:creationId xmlns:a16="http://schemas.microsoft.com/office/drawing/2014/main" id="{2114D60B-B653-4264-BDE6-F94D49C9D3DD}"/>
               </a:ext>
             </a:extLst>
           </p:cNvPr>
@@ -7345,7 +7345,7 @@
           <p:cNvPr id="12" name="">
             <a:extLst xmlns:a="http://schemas.openxmlformats.org/drawingml/2006/main">
               <a:ext uri="{FF2B5EF4-FFF2-40B4-BE49-F238E27FC236}">
-                <a16:creationId xmlns:a16="http://schemas.microsoft.com/office/drawing/2014/main" id="{51B98F34-CC51-4168-A46E-5D4653F36207}"/>
+                <a16:creationId xmlns:a16="http://schemas.microsoft.com/office/drawing/2014/main" id="{A3EF46B1-EB81-4BB3-9535-A459C32DF03D}"/>
               </a:ext>
             </a:extLst>
           </p:cNvPr>
@@ -7402,7 +7402,7 @@
           <p:cNvPr id="13" name="">
             <a:extLst xmlns:a="http://schemas.openxmlformats.org/drawingml/2006/main">
               <a:ext uri="{FF2B5EF4-FFF2-40B4-BE49-F238E27FC236}">
-                <a16:creationId xmlns:a16="http://schemas.microsoft.com/office/drawing/2014/main" id="{0F84C212-95C0-4644-9620-0FD736C2BA28}"/>
+                <a16:creationId xmlns:a16="http://schemas.microsoft.com/office/drawing/2014/main" id="{C9EFB013-418A-4C5B-83E3-90057859A661}"/>
               </a:ext>
             </a:extLst>
           </p:cNvPr>
@@ -7459,7 +7459,7 @@
           <p:cNvPr id="14" name="">
             <a:extLst xmlns:a="http://schemas.openxmlformats.org/drawingml/2006/main">
               <a:ext uri="{FF2B5EF4-FFF2-40B4-BE49-F238E27FC236}">
-                <a16:creationId xmlns:a16="http://schemas.microsoft.com/office/drawing/2014/main" id="{51BB076D-CF00-4B17-A177-17AA28C241FF}"/>
+                <a16:creationId xmlns:a16="http://schemas.microsoft.com/office/drawing/2014/main" id="{E6BF797E-E6A0-4CAA-BA7D-1CFFA934C7E8}"/>
               </a:ext>
             </a:extLst>
           </p:cNvPr>
@@ -7516,7 +7516,7 @@
           <p:cNvPr id="15" name="">
             <a:extLst xmlns:a="http://schemas.openxmlformats.org/drawingml/2006/main">
               <a:ext uri="{FF2B5EF4-FFF2-40B4-BE49-F238E27FC236}">
-                <a16:creationId xmlns:a16="http://schemas.microsoft.com/office/drawing/2014/main" id="{FF86F134-76B5-4245-83E4-F39D42198FEA}"/>
+                <a16:creationId xmlns:a16="http://schemas.microsoft.com/office/drawing/2014/main" id="{3A4FE111-CC86-4C7D-8B48-9B5BBD631CEF}"/>
               </a:ext>
             </a:extLst>
           </p:cNvPr>
@@ -7571,7 +7571,7 @@
     </p:spTree>
     <p:extLst>
       <p:ext uri="{BB962C8B-B14F-4D97-AF65-F5344CB8AC3E}">
-        <p14:creationId xmlns:p14="http://schemas.microsoft.com/office/powerpoint/2010/main" val="1408854806"/>
+        <p14:creationId xmlns:p14="http://schemas.microsoft.com/office/powerpoint/2010/main" val="1955983580"/>
       </p:ext>
     </p:extLst>
   </p:cSld>
@@ -7769,10 +7769,10 @@
       </p:grpSpPr>
       <p:sp>
         <p:nvSpPr>
-          <p:cNvPr id="21" name="">
-            <a:extLst xmlns:a="http://schemas.openxmlformats.org/drawingml/2006/main">
-              <a:ext uri="{FF2B5EF4-FFF2-40B4-BE49-F238E27FC236}">
-                <a16:creationId xmlns:a16="http://schemas.microsoft.com/office/drawing/2014/main" id="{9E7AC3F0-B722-46A4-9EF3-F7ECE0A8B432}"/>
+          <p:cNvPr id="29" name="">
+            <a:extLst xmlns:a="http://schemas.openxmlformats.org/drawingml/2006/main">
+              <a:ext uri="{FF2B5EF4-FFF2-40B4-BE49-F238E27FC236}">
+                <a16:creationId xmlns:a16="http://schemas.microsoft.com/office/drawing/2014/main" id="{7C80FBFF-65EF-4E6D-B0A6-DB1557A770BB}"/>
               </a:ext>
             </a:extLst>
           </p:cNvPr>
@@ -7804,7 +7804,7 @@
           <p:cNvPr id="2" name="">
             <a:extLst xmlns:a="http://schemas.openxmlformats.org/drawingml/2006/main">
               <a:ext uri="{FF2B5EF4-FFF2-40B4-BE49-F238E27FC236}">
-                <a16:creationId xmlns:a16="http://schemas.microsoft.com/office/drawing/2014/main" id="{CC9C9752-178A-4912-9B66-8297470C4DAC}"/>
+                <a16:creationId xmlns:a16="http://schemas.microsoft.com/office/drawing/2014/main" id="{35786DA4-9D72-4C7B-976B-CCCFC3C6F400}"/>
               </a:ext>
             </a:extLst>
           </p:cNvPr>
@@ -7861,7 +7861,7 @@
           <p:cNvPr id="3" name="">
             <a:extLst xmlns:a="http://schemas.openxmlformats.org/drawingml/2006/main">
               <a:ext uri="{FF2B5EF4-FFF2-40B4-BE49-F238E27FC236}">
-                <a16:creationId xmlns:a16="http://schemas.microsoft.com/office/drawing/2014/main" id="{3B7DAFCD-47D6-4E00-90AD-DAF6E9AC8481}"/>
+                <a16:creationId xmlns:a16="http://schemas.microsoft.com/office/drawing/2014/main" id="{7334F811-11D5-4CBC-B1D1-69B659ECE5A4}"/>
               </a:ext>
             </a:extLst>
           </p:cNvPr>
@@ -7893,7 +7893,7 @@
           <p:cNvPr id="4" name="">
             <a:extLst xmlns:a="http://schemas.openxmlformats.org/drawingml/2006/main">
               <a:ext uri="{FF2B5EF4-FFF2-40B4-BE49-F238E27FC236}">
-                <a16:creationId xmlns:a16="http://schemas.microsoft.com/office/drawing/2014/main" id="{69E0D181-231A-4E75-95F5-26F3365DD33F}"/>
+                <a16:creationId xmlns:a16="http://schemas.microsoft.com/office/drawing/2014/main" id="{F7A172C2-5D9E-4A06-B5F9-FF15E392CAA9}"/>
               </a:ext>
             </a:extLst>
           </p:cNvPr>
@@ -7950,7 +7950,7 @@
           <p:cNvPr id="5" name="">
             <a:extLst xmlns:a="http://schemas.openxmlformats.org/drawingml/2006/main">
               <a:ext uri="{FF2B5EF4-FFF2-40B4-BE49-F238E27FC236}">
-                <a16:creationId xmlns:a16="http://schemas.microsoft.com/office/drawing/2014/main" id="{0EAB9E7F-C807-4537-A299-0ACC4491685B}"/>
+                <a16:creationId xmlns:a16="http://schemas.microsoft.com/office/drawing/2014/main" id="{AC77A682-0B14-4DD8-8F40-948228F4723B}"/>
               </a:ext>
             </a:extLst>
           </p:cNvPr>
@@ -8007,7 +8007,7 @@
           <p:cNvPr id="6" name="">
             <a:extLst xmlns:a="http://schemas.openxmlformats.org/drawingml/2006/main">
               <a:ext uri="{FF2B5EF4-FFF2-40B4-BE49-F238E27FC236}">
-                <a16:creationId xmlns:a16="http://schemas.microsoft.com/office/drawing/2014/main" id="{F3CCAC39-5333-4636-8008-246D8E00F66E}"/>
+                <a16:creationId xmlns:a16="http://schemas.microsoft.com/office/drawing/2014/main" id="{1C4A9DB8-4385-4708-A9CA-399B8ECB7E67}"/>
               </a:ext>
             </a:extLst>
           </p:cNvPr>
@@ -8064,7 +8064,7 @@
           <p:cNvPr id="7" name="">
             <a:extLst xmlns:a="http://schemas.openxmlformats.org/drawingml/2006/main">
               <a:ext uri="{FF2B5EF4-FFF2-40B4-BE49-F238E27FC236}">
-                <a16:creationId xmlns:a16="http://schemas.microsoft.com/office/drawing/2014/main" id="{988D59CB-9CC4-49EF-9569-FDC948318ED7}"/>
+                <a16:creationId xmlns:a16="http://schemas.microsoft.com/office/drawing/2014/main" id="{C168EE11-6183-4220-96F2-9B6248C55862}"/>
               </a:ext>
             </a:extLst>
           </p:cNvPr>
@@ -8096,7 +8096,7 @@
           <p:cNvPr id="8" name="">
             <a:extLst xmlns:a="http://schemas.openxmlformats.org/drawingml/2006/main">
               <a:ext uri="{FF2B5EF4-FFF2-40B4-BE49-F238E27FC236}">
-                <a16:creationId xmlns:a16="http://schemas.microsoft.com/office/drawing/2014/main" id="{C4C616AB-0BAA-474A-AE54-CAA053259393}"/>
+                <a16:creationId xmlns:a16="http://schemas.microsoft.com/office/drawing/2014/main" id="{FBEB4652-BC61-49FE-B97E-151C2C696AC6}"/>
               </a:ext>
             </a:extLst>
           </p:cNvPr>
@@ -8153,7 +8153,7 @@
           <p:cNvPr id="9" name="">
             <a:extLst xmlns:a="http://schemas.openxmlformats.org/drawingml/2006/main">
               <a:ext uri="{FF2B5EF4-FFF2-40B4-BE49-F238E27FC236}">
-                <a16:creationId xmlns:a16="http://schemas.microsoft.com/office/drawing/2014/main" id="{A5EDB14A-50EE-4E71-ABB9-FE26B42AD1B7}"/>
+                <a16:creationId xmlns:a16="http://schemas.microsoft.com/office/drawing/2014/main" id="{A5D5F544-EDED-414D-BBF9-79A95A0066F6}"/>
               </a:ext>
             </a:extLst>
           </p:cNvPr>
@@ -8210,19 +8210,19 @@
           <p:cNvPr id="10" name="">
             <a:extLst xmlns:a="http://schemas.openxmlformats.org/drawingml/2006/main">
               <a:ext uri="{FF2B5EF4-FFF2-40B4-BE49-F238E27FC236}">
-                <a16:creationId xmlns:a16="http://schemas.microsoft.com/office/drawing/2014/main" id="{3878C4ED-BA5D-4ACB-8E36-EA729D3BDB82}"/>
-              </a:ext>
-            </a:extLst>
-          </p:cNvPr>
-          <p:cNvSpPr>
-            <a:spLocks xmlns:a="http://schemas.openxmlformats.org/drawingml/2006/main" noGrp="1"/>
-          </p:cNvSpPr>
-          <p:nvPr/>
-        </p:nvSpPr>
-        <p:spPr>
-          <a:xfrm xmlns:a="http://schemas.openxmlformats.org/drawingml/2006/main">
-            <a:off x="914400" y="1257300"/>
-            <a:ext cx="10363200" cy="781050"/>
+                <a16:creationId xmlns:a16="http://schemas.microsoft.com/office/drawing/2014/main" id="{23372184-4893-4300-8309-DF52FC0D91D1}"/>
+              </a:ext>
+            </a:extLst>
+          </p:cNvPr>
+          <p:cNvSpPr>
+            <a:spLocks xmlns:a="http://schemas.openxmlformats.org/drawingml/2006/main" noGrp="1"/>
+          </p:cNvSpPr>
+          <p:nvPr/>
+        </p:nvSpPr>
+        <p:spPr>
+          <a:xfrm xmlns:a="http://schemas.openxmlformats.org/drawingml/2006/main">
+            <a:off x="857250" y="1219200"/>
+            <a:ext cx="10477500" cy="742950"/>
           </a:xfrm>
           <a:prstGeom xmlns:a="http://schemas.openxmlformats.org/drawingml/2006/main" prst="rect">
             <a:avLst/>
@@ -8239,7 +8239,7 @@
           <a:lstStyle xmlns:a="http://schemas.openxmlformats.org/drawingml/2006/main"/>
           <a:p xmlns:a="http://schemas.openxmlformats.org/drawingml/2006/main">
             <a:pPr algn="ctr">
-              <a:defRPr sz="2175" b="1">
+              <a:defRPr sz="2100" b="1">
                 <a:solidFill>
                   <a:srgbClr val="17253A"/>
                 </a:solidFill>
@@ -8249,7 +8249,7 @@
               </a:defRPr>
             </a:pPr>
             <a:r>
-              <a:rPr sz="2175" b="1">
+              <a:rPr sz="2100" b="1">
                 <a:solidFill>
                   <a:srgbClr val="17253A"/>
                 </a:solidFill>
@@ -8267,29 +8267,173 @@
           <p:cNvPr id="11" name="">
             <a:extLst xmlns:a="http://schemas.openxmlformats.org/drawingml/2006/main">
               <a:ext uri="{FF2B5EF4-FFF2-40B4-BE49-F238E27FC236}">
-                <a16:creationId xmlns:a16="http://schemas.microsoft.com/office/drawing/2014/main" id="{71F3D05F-378F-401F-9F8F-83936247DB34}"/>
-              </a:ext>
-            </a:extLst>
-          </p:cNvPr>
-          <p:cNvSpPr>
-            <a:spLocks xmlns:a="http://schemas.openxmlformats.org/drawingml/2006/main" noGrp="1"/>
-          </p:cNvSpPr>
-          <p:nvPr/>
-        </p:nvSpPr>
-        <p:spPr>
-          <a:xfrm xmlns:a="http://schemas.openxmlformats.org/drawingml/2006/main">
-            <a:off x="685800" y="2247900"/>
-            <a:ext cx="3905250" cy="3333750"/>
-          </a:xfrm>
-          <a:prstGeom xmlns:a="http://schemas.openxmlformats.org/drawingml/2006/main" prst="roundRect">
-            <a:avLst>
-              <a:gd name="adj" fmla="val 2286"/>
-            </a:avLst>
+                <a16:creationId xmlns:a16="http://schemas.microsoft.com/office/drawing/2014/main" id="{E332E0BB-46B0-438A-901A-E79E25112E08}"/>
+              </a:ext>
+            </a:extLst>
+          </p:cNvPr>
+          <p:cNvSpPr>
+            <a:spLocks xmlns:a="http://schemas.openxmlformats.org/drawingml/2006/main" noGrp="1"/>
+          </p:cNvSpPr>
+          <p:nvPr/>
+        </p:nvSpPr>
+        <p:spPr>
+          <a:xfrm xmlns:a="http://schemas.openxmlformats.org/drawingml/2006/main">
+            <a:off x="971550" y="2124075"/>
+            <a:ext cx="38100" cy="3524250"/>
+          </a:xfrm>
+          <a:prstGeom xmlns:a="http://schemas.openxmlformats.org/drawingml/2006/main" prst="rect">
+            <a:avLst/>
           </a:prstGeom>
           <a:solidFill xmlns:a="http://schemas.openxmlformats.org/drawingml/2006/main">
-            <a:srgbClr val="FFFFFF"/>
+            <a:srgbClr val="2C6E73"/>
           </a:solidFill>
-          <a:ln xmlns:a="http://schemas.openxmlformats.org/drawingml/2006/main" w="12383">
+          <a:ln xmlns:a="http://schemas.openxmlformats.org/drawingml/2006/main" w="0">
+            <a:solidFill>
+              <a:srgbClr val="2C6E73"/>
+            </a:solidFill>
+          </a:ln>
+        </p:spPr>
+      </p:sp>
+      <p:sp>
+        <p:nvSpPr>
+          <p:cNvPr id="12" name="">
+            <a:extLst xmlns:a="http://schemas.openxmlformats.org/drawingml/2006/main">
+              <a:ext uri="{FF2B5EF4-FFF2-40B4-BE49-F238E27FC236}">
+                <a16:creationId xmlns:a16="http://schemas.microsoft.com/office/drawing/2014/main" id="{4B038B3E-DDB1-4111-BA51-A28C2C79B70C}"/>
+              </a:ext>
+            </a:extLst>
+          </p:cNvPr>
+          <p:cNvSpPr>
+            <a:spLocks xmlns:a="http://schemas.openxmlformats.org/drawingml/2006/main" noGrp="1"/>
+          </p:cNvSpPr>
+          <p:nvPr/>
+        </p:nvSpPr>
+        <p:spPr>
+          <a:xfrm xmlns:a="http://schemas.openxmlformats.org/drawingml/2006/main">
+            <a:off x="1162050" y="2200275"/>
+            <a:ext cx="400050" cy="400050"/>
+          </a:xfrm>
+          <a:prstGeom xmlns:a="http://schemas.openxmlformats.org/drawingml/2006/main" prst="rect">
+            <a:avLst/>
+          </a:prstGeom>
+          <a:noFill xmlns:a="http://schemas.openxmlformats.org/drawingml/2006/main"/>
+          <a:ln xmlns:a="http://schemas.openxmlformats.org/drawingml/2006/main" w="0">
+            <a:noFill/>
+          </a:ln>
+        </p:spPr>
+        <p:txBody>
+          <a:bodyPr xmlns:a="http://schemas.openxmlformats.org/drawingml/2006/main" anchor="ctr">
+            <a:normAutofit fontScale="100000"/>
+          </a:bodyPr>
+          <a:lstStyle xmlns:a="http://schemas.openxmlformats.org/drawingml/2006/main"/>
+          <a:p xmlns:a="http://schemas.openxmlformats.org/drawingml/2006/main">
+            <a:pPr algn="ctr">
+              <a:defRPr sz="1125" b="1">
+                <a:solidFill>
+                  <a:srgbClr val="2C6E73"/>
+                </a:solidFill>
+                <a:latin typeface="Arial"/>
+                <a:ea typeface="Arial"/>
+                <a:cs typeface="Arial"/>
+              </a:defRPr>
+            </a:pPr>
+            <a:r>
+              <a:rPr sz="1125" b="1">
+                <a:solidFill>
+                  <a:srgbClr val="2C6E73"/>
+                </a:solidFill>
+                <a:latin typeface="Arial"/>
+                <a:ea typeface="Arial"/>
+                <a:cs typeface="Arial"/>
+              </a:rPr>
+              <a:t>1</a:t>
+            </a:r>
+          </a:p>
+        </p:txBody>
+      </p:sp>
+      <p:sp>
+        <p:nvSpPr>
+          <p:cNvPr id="13" name="">
+            <a:extLst xmlns:a="http://schemas.openxmlformats.org/drawingml/2006/main">
+              <a:ext uri="{FF2B5EF4-FFF2-40B4-BE49-F238E27FC236}">
+                <a16:creationId xmlns:a16="http://schemas.microsoft.com/office/drawing/2014/main" id="{47BCB1FA-8B93-4485-970E-A7AB9D17DCC5}"/>
+              </a:ext>
+            </a:extLst>
+          </p:cNvPr>
+          <p:cNvSpPr>
+            <a:spLocks xmlns:a="http://schemas.openxmlformats.org/drawingml/2006/main" noGrp="1"/>
+          </p:cNvSpPr>
+          <p:nvPr/>
+        </p:nvSpPr>
+        <p:spPr>
+          <a:xfrm xmlns:a="http://schemas.openxmlformats.org/drawingml/2006/main">
+            <a:off x="1714500" y="2114550"/>
+            <a:ext cx="9525000" cy="514350"/>
+          </a:xfrm>
+          <a:prstGeom xmlns:a="http://schemas.openxmlformats.org/drawingml/2006/main" prst="rect">
+            <a:avLst/>
+          </a:prstGeom>
+          <a:noFill xmlns:a="http://schemas.openxmlformats.org/drawingml/2006/main"/>
+          <a:ln xmlns:a="http://schemas.openxmlformats.org/drawingml/2006/main" w="0">
+            <a:noFill/>
+          </a:ln>
+        </p:spPr>
+        <p:txBody>
+          <a:bodyPr xmlns:a="http://schemas.openxmlformats.org/drawingml/2006/main" anchor="ctr">
+            <a:normAutofit fontScale="100000"/>
+          </a:bodyPr>
+          <a:lstStyle xmlns:a="http://schemas.openxmlformats.org/drawingml/2006/main"/>
+          <a:p xmlns:a="http://schemas.openxmlformats.org/drawingml/2006/main">
+            <a:pPr algn="l">
+              <a:defRPr sz="1350" b="0">
+                <a:solidFill>
+                  <a:srgbClr val="17253A"/>
+                </a:solidFill>
+                <a:latin typeface="Arial"/>
+                <a:ea typeface="Arial"/>
+                <a:cs typeface="Arial"/>
+              </a:defRPr>
+            </a:pPr>
+            <a:r>
+              <a:rPr sz="1350" b="0">
+                <a:solidFill>
+                  <a:srgbClr val="17253A"/>
+                </a:solidFill>
+                <a:latin typeface="Arial"/>
+                <a:ea typeface="Arial"/>
+                <a:cs typeface="Arial"/>
+              </a:rPr>
+              <a:t>12 times table: 12, 24, 36, 48, 60, 72, 84, 96, 108</a:t>
+            </a:r>
+          </a:p>
+        </p:txBody>
+      </p:sp>
+      <p:sp>
+        <p:nvSpPr>
+          <p:cNvPr id="14" name="">
+            <a:extLst xmlns:a="http://schemas.openxmlformats.org/drawingml/2006/main">
+              <a:ext uri="{FF2B5EF4-FFF2-40B4-BE49-F238E27FC236}">
+                <a16:creationId xmlns:a16="http://schemas.microsoft.com/office/drawing/2014/main" id="{4D07C6E9-A89B-40E4-8275-3A9501402524}"/>
+              </a:ext>
+            </a:extLst>
+          </p:cNvPr>
+          <p:cNvSpPr>
+            <a:spLocks xmlns:a="http://schemas.openxmlformats.org/drawingml/2006/main" noGrp="1"/>
+          </p:cNvSpPr>
+          <p:nvPr/>
+        </p:nvSpPr>
+        <p:spPr>
+          <a:xfrm xmlns:a="http://schemas.openxmlformats.org/drawingml/2006/main">
+            <a:off x="1714500" y="2647950"/>
+            <a:ext cx="9334500" cy="9525"/>
+          </a:xfrm>
+          <a:prstGeom xmlns:a="http://schemas.openxmlformats.org/drawingml/2006/main" prst="rect">
+            <a:avLst/>
+          </a:prstGeom>
+          <a:solidFill xmlns:a="http://schemas.openxmlformats.org/drawingml/2006/main">
+            <a:srgbClr val="D9E0E6"/>
+          </a:solidFill>
+          <a:ln xmlns:a="http://schemas.openxmlformats.org/drawingml/2006/main" w="0">
             <a:solidFill>
               <a:srgbClr val="D9E0E6"/>
             </a:solidFill>
@@ -8298,22 +8442,22 @@
       </p:sp>
       <p:sp>
         <p:nvSpPr>
-          <p:cNvPr id="12" name="">
-            <a:extLst xmlns:a="http://schemas.openxmlformats.org/drawingml/2006/main">
-              <a:ext uri="{FF2B5EF4-FFF2-40B4-BE49-F238E27FC236}">
-                <a16:creationId xmlns:a16="http://schemas.microsoft.com/office/drawing/2014/main" id="{879E7045-7674-49B5-A038-5A72123D6A7C}"/>
-              </a:ext>
-            </a:extLst>
-          </p:cNvPr>
-          <p:cNvSpPr>
-            <a:spLocks xmlns:a="http://schemas.openxmlformats.org/drawingml/2006/main" noGrp="1"/>
-          </p:cNvSpPr>
-          <p:nvPr/>
-        </p:nvSpPr>
-        <p:spPr>
-          <a:xfrm xmlns:a="http://schemas.openxmlformats.org/drawingml/2006/main">
-            <a:off x="933450" y="2400300"/>
-            <a:ext cx="3390900" cy="323850"/>
+          <p:cNvPr id="15" name="">
+            <a:extLst xmlns:a="http://schemas.openxmlformats.org/drawingml/2006/main">
+              <a:ext uri="{FF2B5EF4-FFF2-40B4-BE49-F238E27FC236}">
+                <a16:creationId xmlns:a16="http://schemas.microsoft.com/office/drawing/2014/main" id="{00230425-0C1C-4DA4-ADCD-167F39BE67E4}"/>
+              </a:ext>
+            </a:extLst>
+          </p:cNvPr>
+          <p:cNvSpPr>
+            <a:spLocks xmlns:a="http://schemas.openxmlformats.org/drawingml/2006/main" noGrp="1"/>
+          </p:cNvSpPr>
+          <p:nvPr/>
+        </p:nvSpPr>
+        <p:spPr>
+          <a:xfrm xmlns:a="http://schemas.openxmlformats.org/drawingml/2006/main">
+            <a:off x="1162050" y="2781300"/>
+            <a:ext cx="400050" cy="400050"/>
           </a:xfrm>
           <a:prstGeom xmlns:a="http://schemas.openxmlformats.org/drawingml/2006/main" prst="rect">
             <a:avLst/>
@@ -8330,7 +8474,7 @@
           <a:lstStyle xmlns:a="http://schemas.openxmlformats.org/drawingml/2006/main"/>
           <a:p xmlns:a="http://schemas.openxmlformats.org/drawingml/2006/main">
             <a:pPr algn="ctr">
-              <a:defRPr sz="1350" b="1">
+              <a:defRPr sz="1125" b="1">
                 <a:solidFill>
                   <a:srgbClr val="2C6E73"/>
                 </a:solidFill>
@@ -8340,7 +8484,7 @@
               </a:defRPr>
             </a:pPr>
             <a:r>
-              <a:rPr sz="1350" b="1">
+              <a:rPr sz="1125" b="1">
                 <a:solidFill>
                   <a:srgbClr val="2C6E73"/>
                 </a:solidFill>
@@ -8348,29 +8492,29 @@
                 <a:ea typeface="Arial"/>
                 <a:cs typeface="Arial"/>
               </a:rPr>
-              <a:t>Useful multiples</a:t>
-            </a:r>
-          </a:p>
-        </p:txBody>
-      </p:sp>
-      <p:sp>
-        <p:nvSpPr>
-          <p:cNvPr id="13" name="">
-            <a:extLst xmlns:a="http://schemas.openxmlformats.org/drawingml/2006/main">
-              <a:ext uri="{FF2B5EF4-FFF2-40B4-BE49-F238E27FC236}">
-                <a16:creationId xmlns:a16="http://schemas.microsoft.com/office/drawing/2014/main" id="{1D5597D0-7838-48EB-BD84-1004D207AC42}"/>
-              </a:ext>
-            </a:extLst>
-          </p:cNvPr>
-          <p:cNvSpPr>
-            <a:spLocks xmlns:a="http://schemas.openxmlformats.org/drawingml/2006/main" noGrp="1"/>
-          </p:cNvSpPr>
-          <p:nvPr/>
-        </p:nvSpPr>
-        <p:spPr>
-          <a:xfrm xmlns:a="http://schemas.openxmlformats.org/drawingml/2006/main">
-            <a:off x="914400" y="2952750"/>
-            <a:ext cx="3448050" cy="514350"/>
+              <a:t>2</a:t>
+            </a:r>
+          </a:p>
+        </p:txBody>
+      </p:sp>
+      <p:sp>
+        <p:nvSpPr>
+          <p:cNvPr id="16" name="">
+            <a:extLst xmlns:a="http://schemas.openxmlformats.org/drawingml/2006/main">
+              <a:ext uri="{FF2B5EF4-FFF2-40B4-BE49-F238E27FC236}">
+                <a16:creationId xmlns:a16="http://schemas.microsoft.com/office/drawing/2014/main" id="{B9349CF5-AF9D-4BA7-B676-540D65978C29}"/>
+              </a:ext>
+            </a:extLst>
+          </p:cNvPr>
+          <p:cNvSpPr>
+            <a:spLocks xmlns:a="http://schemas.openxmlformats.org/drawingml/2006/main" noGrp="1"/>
+          </p:cNvSpPr>
+          <p:nvPr/>
+        </p:nvSpPr>
+        <p:spPr>
+          <a:xfrm xmlns:a="http://schemas.openxmlformats.org/drawingml/2006/main">
+            <a:off x="1714500" y="2695575"/>
+            <a:ext cx="9525000" cy="514350"/>
           </a:xfrm>
           <a:prstGeom xmlns:a="http://schemas.openxmlformats.org/drawingml/2006/main" prst="rect">
             <a:avLst/>
@@ -8386,8 +8530,8 @@
           </a:bodyPr>
           <a:lstStyle xmlns:a="http://schemas.openxmlformats.org/drawingml/2006/main"/>
           <a:p xmlns:a="http://schemas.openxmlformats.org/drawingml/2006/main">
-            <a:pPr algn="ctr">
-              <a:defRPr sz="1275" b="1">
+            <a:pPr algn="l">
+              <a:defRPr sz="1350" b="0">
                 <a:solidFill>
                   <a:srgbClr val="17253A"/>
                 </a:solidFill>
@@ -8397,7 +8541,7 @@
               </a:defRPr>
             </a:pPr>
             <a:r>
-              <a:rPr sz="1275" b="1">
+              <a:rPr sz="1350" b="0">
                 <a:solidFill>
                   <a:srgbClr val="17253A"/>
                 </a:solidFill>
@@ -8405,29 +8549,61 @@
                 <a:ea typeface="Arial"/>
                 <a:cs typeface="Arial"/>
               </a:rPr>
-              <a:t>1 × 12 = 12     2 × 12 = 24     3 × 12 = 36</a:t>
-            </a:r>
-          </a:p>
-        </p:txBody>
-      </p:sp>
-      <p:sp>
-        <p:nvSpPr>
-          <p:cNvPr id="14" name="">
-            <a:extLst xmlns:a="http://schemas.openxmlformats.org/drawingml/2006/main">
-              <a:ext uri="{FF2B5EF4-FFF2-40B4-BE49-F238E27FC236}">
-                <a16:creationId xmlns:a16="http://schemas.microsoft.com/office/drawing/2014/main" id="{7A795953-AD70-46E8-8E50-A4A60556A572}"/>
-              </a:ext>
-            </a:extLst>
-          </p:cNvPr>
-          <p:cNvSpPr>
-            <a:spLocks xmlns:a="http://schemas.openxmlformats.org/drawingml/2006/main" noGrp="1"/>
-          </p:cNvSpPr>
-          <p:nvPr/>
-        </p:nvSpPr>
-        <p:spPr>
-          <a:xfrm xmlns:a="http://schemas.openxmlformats.org/drawingml/2006/main">
-            <a:off x="914400" y="3695700"/>
-            <a:ext cx="3448050" cy="514350"/>
+              <a:t>37 ÷ 12: choose 36 = 12 × 3; write 3</a:t>
+            </a:r>
+          </a:p>
+        </p:txBody>
+      </p:sp>
+      <p:sp>
+        <p:nvSpPr>
+          <p:cNvPr id="17" name="">
+            <a:extLst xmlns:a="http://schemas.openxmlformats.org/drawingml/2006/main">
+              <a:ext uri="{FF2B5EF4-FFF2-40B4-BE49-F238E27FC236}">
+                <a16:creationId xmlns:a16="http://schemas.microsoft.com/office/drawing/2014/main" id="{D3414FEB-2F53-41F4-A285-7A6C1BE8651B}"/>
+              </a:ext>
+            </a:extLst>
+          </p:cNvPr>
+          <p:cNvSpPr>
+            <a:spLocks xmlns:a="http://schemas.openxmlformats.org/drawingml/2006/main" noGrp="1"/>
+          </p:cNvSpPr>
+          <p:nvPr/>
+        </p:nvSpPr>
+        <p:spPr>
+          <a:xfrm xmlns:a="http://schemas.openxmlformats.org/drawingml/2006/main">
+            <a:off x="1714500" y="3228975"/>
+            <a:ext cx="9334500" cy="9525"/>
+          </a:xfrm>
+          <a:prstGeom xmlns:a="http://schemas.openxmlformats.org/drawingml/2006/main" prst="rect">
+            <a:avLst/>
+          </a:prstGeom>
+          <a:solidFill xmlns:a="http://schemas.openxmlformats.org/drawingml/2006/main">
+            <a:srgbClr val="D9E0E6"/>
+          </a:solidFill>
+          <a:ln xmlns:a="http://schemas.openxmlformats.org/drawingml/2006/main" w="0">
+            <a:solidFill>
+              <a:srgbClr val="D9E0E6"/>
+            </a:solidFill>
+          </a:ln>
+        </p:spPr>
+      </p:sp>
+      <p:sp>
+        <p:nvSpPr>
+          <p:cNvPr id="18" name="">
+            <a:extLst xmlns:a="http://schemas.openxmlformats.org/drawingml/2006/main">
+              <a:ext uri="{FF2B5EF4-FFF2-40B4-BE49-F238E27FC236}">
+                <a16:creationId xmlns:a16="http://schemas.microsoft.com/office/drawing/2014/main" id="{180AE0F1-BFCF-455D-B818-1B25FAC1F33F}"/>
+              </a:ext>
+            </a:extLst>
+          </p:cNvPr>
+          <p:cNvSpPr>
+            <a:spLocks xmlns:a="http://schemas.openxmlformats.org/drawingml/2006/main" noGrp="1"/>
+          </p:cNvSpPr>
+          <p:nvPr/>
+        </p:nvSpPr>
+        <p:spPr>
+          <a:xfrm xmlns:a="http://schemas.openxmlformats.org/drawingml/2006/main">
+            <a:off x="1162050" y="3362325"/>
+            <a:ext cx="400050" cy="400050"/>
           </a:xfrm>
           <a:prstGeom xmlns:a="http://schemas.openxmlformats.org/drawingml/2006/main" prst="rect">
             <a:avLst/>
@@ -8444,9 +8620,9 @@
           <a:lstStyle xmlns:a="http://schemas.openxmlformats.org/drawingml/2006/main"/>
           <a:p xmlns:a="http://schemas.openxmlformats.org/drawingml/2006/main">
             <a:pPr algn="ctr">
-              <a:defRPr sz="1275" b="1">
-                <a:solidFill>
-                  <a:srgbClr val="17253A"/>
+              <a:defRPr sz="1125" b="1">
+                <a:solidFill>
+                  <a:srgbClr val="2C6E73"/>
                 </a:solidFill>
                 <a:latin typeface="Arial"/>
                 <a:ea typeface="Arial"/>
@@ -8454,37 +8630,37 @@
               </a:defRPr>
             </a:pPr>
             <a:r>
-              <a:rPr sz="1275" b="1">
-                <a:solidFill>
-                  <a:srgbClr val="17253A"/>
+              <a:rPr sz="1125" b="1">
+                <a:solidFill>
+                  <a:srgbClr val="2C6E73"/>
                 </a:solidFill>
                 <a:latin typeface="Arial"/>
                 <a:ea typeface="Arial"/>
                 <a:cs typeface="Arial"/>
               </a:rPr>
-              <a:t>4 × 12 = 48     5 × 12 = 60     6 × 12 = 72</a:t>
-            </a:r>
-          </a:p>
-        </p:txBody>
-      </p:sp>
-      <p:sp>
-        <p:nvSpPr>
-          <p:cNvPr id="15" name="">
-            <a:extLst xmlns:a="http://schemas.openxmlformats.org/drawingml/2006/main">
-              <a:ext uri="{FF2B5EF4-FFF2-40B4-BE49-F238E27FC236}">
-                <a16:creationId xmlns:a16="http://schemas.microsoft.com/office/drawing/2014/main" id="{EB1F1A73-1CE2-4A68-AECB-CE4C17BFBC5C}"/>
-              </a:ext>
-            </a:extLst>
-          </p:cNvPr>
-          <p:cNvSpPr>
-            <a:spLocks xmlns:a="http://schemas.openxmlformats.org/drawingml/2006/main" noGrp="1"/>
-          </p:cNvSpPr>
-          <p:nvPr/>
-        </p:nvSpPr>
-        <p:spPr>
-          <a:xfrm xmlns:a="http://schemas.openxmlformats.org/drawingml/2006/main">
-            <a:off x="914400" y="4438650"/>
-            <a:ext cx="3448050" cy="514350"/>
+              <a:t>3</a:t>
+            </a:r>
+          </a:p>
+        </p:txBody>
+      </p:sp>
+      <p:sp>
+        <p:nvSpPr>
+          <p:cNvPr id="19" name="">
+            <a:extLst xmlns:a="http://schemas.openxmlformats.org/drawingml/2006/main">
+              <a:ext uri="{FF2B5EF4-FFF2-40B4-BE49-F238E27FC236}">
+                <a16:creationId xmlns:a16="http://schemas.microsoft.com/office/drawing/2014/main" id="{D3627C9A-6369-477E-AAB0-CA036A678D7F}"/>
+              </a:ext>
+            </a:extLst>
+          </p:cNvPr>
+          <p:cNvSpPr>
+            <a:spLocks xmlns:a="http://schemas.openxmlformats.org/drawingml/2006/main" noGrp="1"/>
+          </p:cNvSpPr>
+          <p:nvPr/>
+        </p:nvSpPr>
+        <p:spPr>
+          <a:xfrm xmlns:a="http://schemas.openxmlformats.org/drawingml/2006/main">
+            <a:off x="1714500" y="3276600"/>
+            <a:ext cx="9525000" cy="514350"/>
           </a:xfrm>
           <a:prstGeom xmlns:a="http://schemas.openxmlformats.org/drawingml/2006/main" prst="rect">
             <a:avLst/>
@@ -8500,8 +8676,8 @@
           </a:bodyPr>
           <a:lstStyle xmlns:a="http://schemas.openxmlformats.org/drawingml/2006/main"/>
           <a:p xmlns:a="http://schemas.openxmlformats.org/drawingml/2006/main">
-            <a:pPr algn="ctr">
-              <a:defRPr sz="1275" b="1">
+            <a:pPr algn="l">
+              <a:defRPr sz="1350" b="0">
                 <a:solidFill>
                   <a:srgbClr val="17253A"/>
                 </a:solidFill>
@@ -8511,7 +8687,7 @@
               </a:defRPr>
             </a:pPr>
             <a:r>
-              <a:rPr sz="1275" b="1">
+              <a:rPr sz="1350" b="0">
                 <a:solidFill>
                   <a:srgbClr val="17253A"/>
                 </a:solidFill>
@@ -8519,39 +8695,37 @@
                 <a:ea typeface="Arial"/>
                 <a:cs typeface="Arial"/>
               </a:rPr>
-              <a:t>7 × 12 = 84     8 × 12 = 96     9 × 12 = 108</a:t>
-            </a:r>
-          </a:p>
-        </p:txBody>
-      </p:sp>
-      <p:sp>
-        <p:nvSpPr>
-          <p:cNvPr id="16" name="">
-            <a:extLst xmlns:a="http://schemas.openxmlformats.org/drawingml/2006/main">
-              <a:ext uri="{FF2B5EF4-FFF2-40B4-BE49-F238E27FC236}">
-                <a16:creationId xmlns:a16="http://schemas.microsoft.com/office/drawing/2014/main" id="{66DBF76F-9861-4C3C-919D-48BC503078ED}"/>
-              </a:ext>
-            </a:extLst>
-          </p:cNvPr>
-          <p:cNvSpPr>
-            <a:spLocks xmlns:a="http://schemas.openxmlformats.org/drawingml/2006/main" noGrp="1"/>
-          </p:cNvSpPr>
-          <p:nvPr/>
-        </p:nvSpPr>
-        <p:spPr>
-          <a:xfrm xmlns:a="http://schemas.openxmlformats.org/drawingml/2006/main">
-            <a:off x="4857750" y="2247900"/>
-            <a:ext cx="6648450" cy="3333750"/>
-          </a:xfrm>
-          <a:prstGeom xmlns:a="http://schemas.openxmlformats.org/drawingml/2006/main" prst="roundRect">
-            <a:avLst>
-              <a:gd name="adj" fmla="val 2286"/>
-            </a:avLst>
+              <a:t>37 - 36 = 1; bring down 4 → 14; choose 12; write 1</a:t>
+            </a:r>
+          </a:p>
+        </p:txBody>
+      </p:sp>
+      <p:sp>
+        <p:nvSpPr>
+          <p:cNvPr id="20" name="">
+            <a:extLst xmlns:a="http://schemas.openxmlformats.org/drawingml/2006/main">
+              <a:ext uri="{FF2B5EF4-FFF2-40B4-BE49-F238E27FC236}">
+                <a16:creationId xmlns:a16="http://schemas.microsoft.com/office/drawing/2014/main" id="{3C6F5C7F-D566-430C-BD9A-B8AE8B176C59}"/>
+              </a:ext>
+            </a:extLst>
+          </p:cNvPr>
+          <p:cNvSpPr>
+            <a:spLocks xmlns:a="http://schemas.openxmlformats.org/drawingml/2006/main" noGrp="1"/>
+          </p:cNvSpPr>
+          <p:nvPr/>
+        </p:nvSpPr>
+        <p:spPr>
+          <a:xfrm xmlns:a="http://schemas.openxmlformats.org/drawingml/2006/main">
+            <a:off x="1714500" y="3810000"/>
+            <a:ext cx="9334500" cy="9525"/>
+          </a:xfrm>
+          <a:prstGeom xmlns:a="http://schemas.openxmlformats.org/drawingml/2006/main" prst="rect">
+            <a:avLst/>
           </a:prstGeom>
           <a:solidFill xmlns:a="http://schemas.openxmlformats.org/drawingml/2006/main">
-            <a:srgbClr val="E7F1F1"/>
+            <a:srgbClr val="D9E0E6"/>
           </a:solidFill>
-          <a:ln xmlns:a="http://schemas.openxmlformats.org/drawingml/2006/main" w="12383">
+          <a:ln xmlns:a="http://schemas.openxmlformats.org/drawingml/2006/main" w="0">
             <a:solidFill>
               <a:srgbClr val="D9E0E6"/>
             </a:solidFill>
@@ -8560,22 +8734,22 @@
       </p:sp>
       <p:sp>
         <p:nvSpPr>
-          <p:cNvPr id="17" name="">
-            <a:extLst xmlns:a="http://schemas.openxmlformats.org/drawingml/2006/main">
-              <a:ext uri="{FF2B5EF4-FFF2-40B4-BE49-F238E27FC236}">
-                <a16:creationId xmlns:a16="http://schemas.microsoft.com/office/drawing/2014/main" id="{D1694AEE-5F1D-4B12-BF78-EB660B34562B}"/>
-              </a:ext>
-            </a:extLst>
-          </p:cNvPr>
-          <p:cNvSpPr>
-            <a:spLocks xmlns:a="http://schemas.openxmlformats.org/drawingml/2006/main" noGrp="1"/>
-          </p:cNvSpPr>
-          <p:nvPr/>
-        </p:nvSpPr>
-        <p:spPr>
-          <a:xfrm xmlns:a="http://schemas.openxmlformats.org/drawingml/2006/main">
-            <a:off x="5143500" y="2400300"/>
-            <a:ext cx="6096000" cy="590550"/>
+          <p:cNvPr id="21" name="">
+            <a:extLst xmlns:a="http://schemas.openxmlformats.org/drawingml/2006/main">
+              <a:ext uri="{FF2B5EF4-FFF2-40B4-BE49-F238E27FC236}">
+                <a16:creationId xmlns:a16="http://schemas.microsoft.com/office/drawing/2014/main" id="{6D562D7E-7C78-43E1-807E-0C3A82DD1CF0}"/>
+              </a:ext>
+            </a:extLst>
+          </p:cNvPr>
+          <p:cNvSpPr>
+            <a:spLocks xmlns:a="http://schemas.openxmlformats.org/drawingml/2006/main" noGrp="1"/>
+          </p:cNvSpPr>
+          <p:nvPr/>
+        </p:nvSpPr>
+        <p:spPr>
+          <a:xfrm xmlns:a="http://schemas.openxmlformats.org/drawingml/2006/main">
+            <a:off x="1162050" y="3943350"/>
+            <a:ext cx="400050" cy="400050"/>
           </a:xfrm>
           <a:prstGeom xmlns:a="http://schemas.openxmlformats.org/drawingml/2006/main" prst="rect">
             <a:avLst/>
@@ -8591,10 +8765,10 @@
           </a:bodyPr>
           <a:lstStyle xmlns:a="http://schemas.openxmlformats.org/drawingml/2006/main"/>
           <a:p xmlns:a="http://schemas.openxmlformats.org/drawingml/2006/main">
-            <a:pPr algn="l">
-              <a:defRPr sz="1350" b="0">
-                <a:solidFill>
-                  <a:srgbClr val="17253A"/>
+            <a:pPr algn="ctr">
+              <a:defRPr sz="1125" b="1">
+                <a:solidFill>
+                  <a:srgbClr val="2C6E73"/>
                 </a:solidFill>
                 <a:latin typeface="Arial"/>
                 <a:ea typeface="Arial"/>
@@ -8602,37 +8776,37 @@
               </a:defRPr>
             </a:pPr>
             <a:r>
-              <a:rPr sz="1350" b="0">
-                <a:solidFill>
-                  <a:srgbClr val="17253A"/>
+              <a:rPr sz="1125" b="1">
+                <a:solidFill>
+                  <a:srgbClr val="2C6E73"/>
                 </a:solidFill>
                 <a:latin typeface="Arial"/>
                 <a:ea typeface="Arial"/>
                 <a:cs typeface="Arial"/>
               </a:rPr>
-              <a:t>1. 37 ÷ 12 = 3. Write 3; subtract 36; remainder 1. Bring down 4.</a:t>
-            </a:r>
-          </a:p>
-        </p:txBody>
-      </p:sp>
-      <p:sp>
-        <p:nvSpPr>
-          <p:cNvPr id="18" name="">
-            <a:extLst xmlns:a="http://schemas.openxmlformats.org/drawingml/2006/main">
-              <a:ext uri="{FF2B5EF4-FFF2-40B4-BE49-F238E27FC236}">
-                <a16:creationId xmlns:a16="http://schemas.microsoft.com/office/drawing/2014/main" id="{B6CB7FDD-8F3C-4DEC-BE0E-295F20D37BCC}"/>
-              </a:ext>
-            </a:extLst>
-          </p:cNvPr>
-          <p:cNvSpPr>
-            <a:spLocks xmlns:a="http://schemas.openxmlformats.org/drawingml/2006/main" noGrp="1"/>
-          </p:cNvSpPr>
-          <p:nvPr/>
-        </p:nvSpPr>
-        <p:spPr>
-          <a:xfrm xmlns:a="http://schemas.openxmlformats.org/drawingml/2006/main">
-            <a:off x="5143500" y="3133725"/>
-            <a:ext cx="6096000" cy="590550"/>
+              <a:t>4</a:t>
+            </a:r>
+          </a:p>
+        </p:txBody>
+      </p:sp>
+      <p:sp>
+        <p:nvSpPr>
+          <p:cNvPr id="22" name="">
+            <a:extLst xmlns:a="http://schemas.openxmlformats.org/drawingml/2006/main">
+              <a:ext uri="{FF2B5EF4-FFF2-40B4-BE49-F238E27FC236}">
+                <a16:creationId xmlns:a16="http://schemas.microsoft.com/office/drawing/2014/main" id="{B939A95C-BDD1-44BD-95A0-AC210C608AE3}"/>
+              </a:ext>
+            </a:extLst>
+          </p:cNvPr>
+          <p:cNvSpPr>
+            <a:spLocks xmlns:a="http://schemas.openxmlformats.org/drawingml/2006/main" noGrp="1"/>
+          </p:cNvSpPr>
+          <p:nvPr/>
+        </p:nvSpPr>
+        <p:spPr>
+          <a:xfrm xmlns:a="http://schemas.openxmlformats.org/drawingml/2006/main">
+            <a:off x="1714500" y="3857625"/>
+            <a:ext cx="9525000" cy="514350"/>
           </a:xfrm>
           <a:prstGeom xmlns:a="http://schemas.openxmlformats.org/drawingml/2006/main" prst="rect">
             <a:avLst/>
@@ -8667,29 +8841,61 @@
                 <a:ea typeface="Arial"/>
                 <a:cs typeface="Arial"/>
               </a:rPr>
-              <a:t>2. 14 ÷ 12 = 1. Write 1; subtract 12; remainder 2. Bring down 4.</a:t>
-            </a:r>
-          </a:p>
-        </p:txBody>
-      </p:sp>
-      <p:sp>
-        <p:nvSpPr>
-          <p:cNvPr id="19" name="">
-            <a:extLst xmlns:a="http://schemas.openxmlformats.org/drawingml/2006/main">
-              <a:ext uri="{FF2B5EF4-FFF2-40B4-BE49-F238E27FC236}">
-                <a16:creationId xmlns:a16="http://schemas.microsoft.com/office/drawing/2014/main" id="{F18BB4B7-E5EF-4DB0-9C26-9219D2FF7679}"/>
-              </a:ext>
-            </a:extLst>
-          </p:cNvPr>
-          <p:cNvSpPr>
-            <a:spLocks xmlns:a="http://schemas.openxmlformats.org/drawingml/2006/main" noGrp="1"/>
-          </p:cNvSpPr>
-          <p:nvPr/>
-        </p:nvSpPr>
-        <p:spPr>
-          <a:xfrm xmlns:a="http://schemas.openxmlformats.org/drawingml/2006/main">
-            <a:off x="5143500" y="3867150"/>
-            <a:ext cx="6096000" cy="590550"/>
+              <a:t>14 - 12 = 2; bring down 4 → 24; choose 24; write 2</a:t>
+            </a:r>
+          </a:p>
+        </p:txBody>
+      </p:sp>
+      <p:sp>
+        <p:nvSpPr>
+          <p:cNvPr id="23" name="">
+            <a:extLst xmlns:a="http://schemas.openxmlformats.org/drawingml/2006/main">
+              <a:ext uri="{FF2B5EF4-FFF2-40B4-BE49-F238E27FC236}">
+                <a16:creationId xmlns:a16="http://schemas.microsoft.com/office/drawing/2014/main" id="{0A36B7AD-C622-47C2-8D57-779484284583}"/>
+              </a:ext>
+            </a:extLst>
+          </p:cNvPr>
+          <p:cNvSpPr>
+            <a:spLocks xmlns:a="http://schemas.openxmlformats.org/drawingml/2006/main" noGrp="1"/>
+          </p:cNvSpPr>
+          <p:nvPr/>
+        </p:nvSpPr>
+        <p:spPr>
+          <a:xfrm xmlns:a="http://schemas.openxmlformats.org/drawingml/2006/main">
+            <a:off x="1714500" y="4391025"/>
+            <a:ext cx="9334500" cy="9525"/>
+          </a:xfrm>
+          <a:prstGeom xmlns:a="http://schemas.openxmlformats.org/drawingml/2006/main" prst="rect">
+            <a:avLst/>
+          </a:prstGeom>
+          <a:solidFill xmlns:a="http://schemas.openxmlformats.org/drawingml/2006/main">
+            <a:srgbClr val="D9E0E6"/>
+          </a:solidFill>
+          <a:ln xmlns:a="http://schemas.openxmlformats.org/drawingml/2006/main" w="0">
+            <a:solidFill>
+              <a:srgbClr val="D9E0E6"/>
+            </a:solidFill>
+          </a:ln>
+        </p:spPr>
+      </p:sp>
+      <p:sp>
+        <p:nvSpPr>
+          <p:cNvPr id="24" name="">
+            <a:extLst xmlns:a="http://schemas.openxmlformats.org/drawingml/2006/main">
+              <a:ext uri="{FF2B5EF4-FFF2-40B4-BE49-F238E27FC236}">
+                <a16:creationId xmlns:a16="http://schemas.microsoft.com/office/drawing/2014/main" id="{7C6E6797-D235-436B-A728-88DE6CAB8C49}"/>
+              </a:ext>
+            </a:extLst>
+          </p:cNvPr>
+          <p:cNvSpPr>
+            <a:spLocks xmlns:a="http://schemas.openxmlformats.org/drawingml/2006/main" noGrp="1"/>
+          </p:cNvSpPr>
+          <p:nvPr/>
+        </p:nvSpPr>
+        <p:spPr>
+          <a:xfrm xmlns:a="http://schemas.openxmlformats.org/drawingml/2006/main">
+            <a:off x="1162050" y="4524375"/>
+            <a:ext cx="400050" cy="400050"/>
           </a:xfrm>
           <a:prstGeom xmlns:a="http://schemas.openxmlformats.org/drawingml/2006/main" prst="rect">
             <a:avLst/>
@@ -8705,10 +8911,10 @@
           </a:bodyPr>
           <a:lstStyle xmlns:a="http://schemas.openxmlformats.org/drawingml/2006/main"/>
           <a:p xmlns:a="http://schemas.openxmlformats.org/drawingml/2006/main">
-            <a:pPr algn="l">
-              <a:defRPr sz="1350" b="0">
-                <a:solidFill>
-                  <a:srgbClr val="17253A"/>
+            <a:pPr algn="ctr">
+              <a:defRPr sz="1125" b="1">
+                <a:solidFill>
+                  <a:srgbClr val="2C6E73"/>
                 </a:solidFill>
                 <a:latin typeface="Arial"/>
                 <a:ea typeface="Arial"/>
@@ -8716,37 +8922,37 @@
               </a:defRPr>
             </a:pPr>
             <a:r>
-              <a:rPr sz="1350" b="0">
-                <a:solidFill>
-                  <a:srgbClr val="17253A"/>
+              <a:rPr sz="1125" b="1">
+                <a:solidFill>
+                  <a:srgbClr val="2C6E73"/>
                 </a:solidFill>
                 <a:latin typeface="Arial"/>
                 <a:ea typeface="Arial"/>
                 <a:cs typeface="Arial"/>
               </a:rPr>
-              <a:t>3. 24 ÷ 12 = 2. Write 2; subtract 24; remainder 0.</a:t>
-            </a:r>
-          </a:p>
-        </p:txBody>
-      </p:sp>
-      <p:sp>
-        <p:nvSpPr>
-          <p:cNvPr id="20" name="">
-            <a:extLst xmlns:a="http://schemas.openxmlformats.org/drawingml/2006/main">
-              <a:ext uri="{FF2B5EF4-FFF2-40B4-BE49-F238E27FC236}">
-                <a16:creationId xmlns:a16="http://schemas.microsoft.com/office/drawing/2014/main" id="{422AD3A4-03A9-4FCB-895F-7AFEAD2B0ABB}"/>
-              </a:ext>
-            </a:extLst>
-          </p:cNvPr>
-          <p:cNvSpPr>
-            <a:spLocks xmlns:a="http://schemas.openxmlformats.org/drawingml/2006/main" noGrp="1"/>
-          </p:cNvSpPr>
-          <p:nvPr/>
-        </p:nvSpPr>
-        <p:spPr>
-          <a:xfrm xmlns:a="http://schemas.openxmlformats.org/drawingml/2006/main">
-            <a:off x="5143500" y="4600575"/>
-            <a:ext cx="6096000" cy="590550"/>
+              <a:t>5</a:t>
+            </a:r>
+          </a:p>
+        </p:txBody>
+      </p:sp>
+      <p:sp>
+        <p:nvSpPr>
+          <p:cNvPr id="25" name="">
+            <a:extLst xmlns:a="http://schemas.openxmlformats.org/drawingml/2006/main">
+              <a:ext uri="{FF2B5EF4-FFF2-40B4-BE49-F238E27FC236}">
+                <a16:creationId xmlns:a16="http://schemas.microsoft.com/office/drawing/2014/main" id="{E2B846FF-8CEF-477E-A08C-55C8536D351C}"/>
+              </a:ext>
+            </a:extLst>
+          </p:cNvPr>
+          <p:cNvSpPr>
+            <a:spLocks xmlns:a="http://schemas.openxmlformats.org/drawingml/2006/main" noGrp="1"/>
+          </p:cNvSpPr>
+          <p:nvPr/>
+        </p:nvSpPr>
+        <p:spPr>
+          <a:xfrm xmlns:a="http://schemas.openxmlformats.org/drawingml/2006/main">
+            <a:off x="1714500" y="4438650"/>
+            <a:ext cx="9525000" cy="514350"/>
           </a:xfrm>
           <a:prstGeom xmlns:a="http://schemas.openxmlformats.org/drawingml/2006/main" prst="rect">
             <a:avLst/>
@@ -8763,9 +8969,9 @@
           <a:lstStyle xmlns:a="http://schemas.openxmlformats.org/drawingml/2006/main"/>
           <a:p xmlns:a="http://schemas.openxmlformats.org/drawingml/2006/main">
             <a:pPr algn="l">
-              <a:defRPr sz="1350" b="1">
-                <a:solidFill>
-                  <a:srgbClr val="2F785D"/>
+              <a:defRPr sz="1350" b="0">
+                <a:solidFill>
+                  <a:srgbClr val="17253A"/>
                 </a:solidFill>
                 <a:latin typeface="Arial"/>
                 <a:ea typeface="Arial"/>
@@ -8773,6 +8979,152 @@
               </a:defRPr>
             </a:pPr>
             <a:r>
+              <a:rPr sz="1350" b="0">
+                <a:solidFill>
+                  <a:srgbClr val="17253A"/>
+                </a:solidFill>
+                <a:latin typeface="Arial"/>
+                <a:ea typeface="Arial"/>
+                <a:cs typeface="Arial"/>
+              </a:rPr>
+              <a:t>Quotient = 312</a:t>
+            </a:r>
+          </a:p>
+        </p:txBody>
+      </p:sp>
+      <p:sp>
+        <p:nvSpPr>
+          <p:cNvPr id="26" name="">
+            <a:extLst xmlns:a="http://schemas.openxmlformats.org/drawingml/2006/main">
+              <a:ext uri="{FF2B5EF4-FFF2-40B4-BE49-F238E27FC236}">
+                <a16:creationId xmlns:a16="http://schemas.microsoft.com/office/drawing/2014/main" id="{778587E4-D2A2-4849-A85C-A43D36D8FFD0}"/>
+              </a:ext>
+            </a:extLst>
+          </p:cNvPr>
+          <p:cNvSpPr>
+            <a:spLocks xmlns:a="http://schemas.openxmlformats.org/drawingml/2006/main" noGrp="1"/>
+          </p:cNvSpPr>
+          <p:nvPr/>
+        </p:nvSpPr>
+        <p:spPr>
+          <a:xfrm xmlns:a="http://schemas.openxmlformats.org/drawingml/2006/main">
+            <a:off x="1714500" y="4972050"/>
+            <a:ext cx="9334500" cy="9525"/>
+          </a:xfrm>
+          <a:prstGeom xmlns:a="http://schemas.openxmlformats.org/drawingml/2006/main" prst="rect">
+            <a:avLst/>
+          </a:prstGeom>
+          <a:solidFill xmlns:a="http://schemas.openxmlformats.org/drawingml/2006/main">
+            <a:srgbClr val="D9E0E6"/>
+          </a:solidFill>
+          <a:ln xmlns:a="http://schemas.openxmlformats.org/drawingml/2006/main" w="0">
+            <a:solidFill>
+              <a:srgbClr val="D9E0E6"/>
+            </a:solidFill>
+          </a:ln>
+        </p:spPr>
+      </p:sp>
+      <p:sp>
+        <p:nvSpPr>
+          <p:cNvPr id="27" name="">
+            <a:extLst xmlns:a="http://schemas.openxmlformats.org/drawingml/2006/main">
+              <a:ext uri="{FF2B5EF4-FFF2-40B4-BE49-F238E27FC236}">
+                <a16:creationId xmlns:a16="http://schemas.microsoft.com/office/drawing/2014/main" id="{798A7461-99FC-45C4-8DA1-B4D2E0213B85}"/>
+              </a:ext>
+            </a:extLst>
+          </p:cNvPr>
+          <p:cNvSpPr>
+            <a:spLocks xmlns:a="http://schemas.openxmlformats.org/drawingml/2006/main" noGrp="1"/>
+          </p:cNvSpPr>
+          <p:nvPr/>
+        </p:nvSpPr>
+        <p:spPr>
+          <a:xfrm xmlns:a="http://schemas.openxmlformats.org/drawingml/2006/main">
+            <a:off x="1162050" y="5105400"/>
+            <a:ext cx="400050" cy="400050"/>
+          </a:xfrm>
+          <a:prstGeom xmlns:a="http://schemas.openxmlformats.org/drawingml/2006/main" prst="rect">
+            <a:avLst/>
+          </a:prstGeom>
+          <a:noFill xmlns:a="http://schemas.openxmlformats.org/drawingml/2006/main"/>
+          <a:ln xmlns:a="http://schemas.openxmlformats.org/drawingml/2006/main" w="0">
+            <a:noFill/>
+          </a:ln>
+        </p:spPr>
+        <p:txBody>
+          <a:bodyPr xmlns:a="http://schemas.openxmlformats.org/drawingml/2006/main" anchor="ctr">
+            <a:normAutofit fontScale="100000"/>
+          </a:bodyPr>
+          <a:lstStyle xmlns:a="http://schemas.openxmlformats.org/drawingml/2006/main"/>
+          <a:p xmlns:a="http://schemas.openxmlformats.org/drawingml/2006/main">
+            <a:pPr algn="ctr">
+              <a:defRPr sz="1125" b="1">
+                <a:solidFill>
+                  <a:srgbClr val="2F785D"/>
+                </a:solidFill>
+                <a:latin typeface="Arial"/>
+                <a:ea typeface="Arial"/>
+                <a:cs typeface="Arial"/>
+              </a:defRPr>
+            </a:pPr>
+            <a:r>
+              <a:rPr sz="1125" b="1">
+                <a:solidFill>
+                  <a:srgbClr val="2F785D"/>
+                </a:solidFill>
+                <a:latin typeface="Arial"/>
+                <a:ea typeface="Arial"/>
+                <a:cs typeface="Arial"/>
+              </a:rPr>
+              <a:t>6</a:t>
+            </a:r>
+          </a:p>
+        </p:txBody>
+      </p:sp>
+      <p:sp>
+        <p:nvSpPr>
+          <p:cNvPr id="28" name="">
+            <a:extLst xmlns:a="http://schemas.openxmlformats.org/drawingml/2006/main">
+              <a:ext uri="{FF2B5EF4-FFF2-40B4-BE49-F238E27FC236}">
+                <a16:creationId xmlns:a16="http://schemas.microsoft.com/office/drawing/2014/main" id="{78D143AC-3CD8-4C2E-8260-2A7209E8BC71}"/>
+              </a:ext>
+            </a:extLst>
+          </p:cNvPr>
+          <p:cNvSpPr>
+            <a:spLocks xmlns:a="http://schemas.openxmlformats.org/drawingml/2006/main" noGrp="1"/>
+          </p:cNvSpPr>
+          <p:nvPr/>
+        </p:nvSpPr>
+        <p:spPr>
+          <a:xfrm xmlns:a="http://schemas.openxmlformats.org/drawingml/2006/main">
+            <a:off x="1714500" y="5019675"/>
+            <a:ext cx="9525000" cy="514350"/>
+          </a:xfrm>
+          <a:prstGeom xmlns:a="http://schemas.openxmlformats.org/drawingml/2006/main" prst="rect">
+            <a:avLst/>
+          </a:prstGeom>
+          <a:noFill xmlns:a="http://schemas.openxmlformats.org/drawingml/2006/main"/>
+          <a:ln xmlns:a="http://schemas.openxmlformats.org/drawingml/2006/main" w="0">
+            <a:noFill/>
+          </a:ln>
+        </p:spPr>
+        <p:txBody>
+          <a:bodyPr xmlns:a="http://schemas.openxmlformats.org/drawingml/2006/main" anchor="ctr">
+            <a:normAutofit fontScale="100000"/>
+          </a:bodyPr>
+          <a:lstStyle xmlns:a="http://schemas.openxmlformats.org/drawingml/2006/main"/>
+          <a:p xmlns:a="http://schemas.openxmlformats.org/drawingml/2006/main">
+            <a:pPr algn="l">
+              <a:defRPr sz="1350" b="1">
+                <a:solidFill>
+                  <a:srgbClr val="2F785D"/>
+                </a:solidFill>
+                <a:latin typeface="Arial"/>
+                <a:ea typeface="Arial"/>
+                <a:cs typeface="Arial"/>
+              </a:defRPr>
+            </a:pPr>
+            <a:r>
               <a:rPr sz="1350" b="1">
                 <a:solidFill>
                   <a:srgbClr val="2F785D"/>
@@ -8781,7 +9133,7 @@
                 <a:ea typeface="Arial"/>
                 <a:cs typeface="Arial"/>
               </a:rPr>
-              <a:t>4. Quotient 312. Check: 312 × 12 = 3744.</a:t>
+              <a:t>Check: 312 × 12 = 3,744</a:t>
             </a:r>
           </a:p>
         </p:txBody>
@@ -8789,7 +9141,7 @@
     </p:spTree>
     <p:extLst>
       <p:ext uri="{BB962C8B-B14F-4D97-AF65-F5344CB8AC3E}">
-        <p14:creationId xmlns:p14="http://schemas.microsoft.com/office/powerpoint/2010/main" val="1340101608"/>
+        <p14:creationId xmlns:p14="http://schemas.microsoft.com/office/powerpoint/2010/main" val="1158626695"/>
       </p:ext>
     </p:extLst>
   </p:cSld>
@@ -8917,7 +9269,7 @@
                                           </p:stCondLst>
                                         </p:cTn>
                                         <p:tgtEl>
-                                          <p:spTgt spid="14"/>
+                                          <p:spTgt spid="16"/>
                                         </p:tgtEl>
                                         <p:attrNameLst>
                                           <p:attrName>style.visibility</p:attrName>
@@ -8962,7 +9314,7 @@
                                           </p:stCondLst>
                                         </p:cTn>
                                         <p:tgtEl>
-                                          <p:spTgt spid="15"/>
+                                          <p:spTgt spid="19"/>
                                         </p:tgtEl>
                                         <p:attrNameLst>
                                           <p:attrName>style.visibility</p:attrName>
@@ -9007,7 +9359,7 @@
                                           </p:stCondLst>
                                         </p:cTn>
                                         <p:tgtEl>
-                                          <p:spTgt spid="17"/>
+                                          <p:spTgt spid="22"/>
                                         </p:tgtEl>
                                         <p:attrNameLst>
                                           <p:attrName>style.visibility</p:attrName>
@@ -9052,7 +9404,7 @@
                                           </p:stCondLst>
                                         </p:cTn>
                                         <p:tgtEl>
-                                          <p:spTgt spid="18"/>
+                                          <p:spTgt spid="25"/>
                                         </p:tgtEl>
                                         <p:attrNameLst>
                                           <p:attrName>style.visibility</p:attrName>
@@ -9097,52 +9449,7 @@
                                           </p:stCondLst>
                                         </p:cTn>
                                         <p:tgtEl>
-                                          <p:spTgt spid="19"/>
-                                        </p:tgtEl>
-                                        <p:attrNameLst>
-                                          <p:attrName>style.visibility</p:attrName>
-                                        </p:attrNameLst>
-                                      </p:cBhvr>
-                                      <p:to>
-                                        <p:strVal val="visible"/>
-                                      </p:to>
-                                    </p:set>
-                                  </p:childTnLst>
-                                </p:cTn>
-                              </p:par>
-                            </p:childTnLst>
-                          </p:cTn>
-                        </p:par>
-                      </p:childTnLst>
-                    </p:cTn>
-                  </p:par>
-                  <p:par>
-                    <p:cTn id="31" fill="hold">
-                      <p:stCondLst>
-                        <p:cond delay="indefinite"/>
-                      </p:stCondLst>
-                      <p:childTnLst>
-                        <p:par>
-                          <p:cTn id="32" fill="hold">
-                            <p:stCondLst>
-                              <p:cond delay="0"/>
-                            </p:stCondLst>
-                            <p:childTnLst>
-                              <p:par>
-                                <p:cTn id="33" presetID="1" presetClass="entr" presetSubtype="0" fill="hold" grpId="0" nodeType="clickEffect">
-                                  <p:stCondLst>
-                                    <p:cond delay="0"/>
-                                  </p:stCondLst>
-                                  <p:childTnLst>
-                                    <p:set>
-                                      <p:cBhvr>
-                                        <p:cTn id="34" dur="1" fill="hold">
-                                          <p:stCondLst>
-                                            <p:cond delay="0"/>
-                                          </p:stCondLst>
-                                        </p:cTn>
-                                        <p:tgtEl>
-                                          <p:spTgt spid="20"/>
+                                          <p:spTgt spid="28"/>
                                         </p:tgtEl>
                                         <p:attrNameLst>
                                           <p:attrName>style.visibility</p:attrName>
@@ -9185,12 +9492,11 @@
     <p:bldLst>
       <p:bldP spid="10" grpId="0"/>
       <p:bldP spid="13" grpId="0"/>
-      <p:bldP spid="14" grpId="0"/>
-      <p:bldP spid="15" grpId="0"/>
-      <p:bldP spid="17" grpId="0"/>
-      <p:bldP spid="18" grpId="0"/>
+      <p:bldP spid="16" grpId="0"/>
       <p:bldP spid="19" grpId="0"/>
-      <p:bldP spid="20" grpId="0"/>
+      <p:bldP spid="22" grpId="0"/>
+      <p:bldP spid="25" grpId="0"/>
+      <p:bldP spid="28" grpId="0"/>
     </p:bldLst>
   </p:timing>
 </p:sld>
@@ -9220,7 +9526,7 @@
           <p:cNvPr id="15" name="">
             <a:extLst xmlns:a="http://schemas.openxmlformats.org/drawingml/2006/main">
               <a:ext uri="{FF2B5EF4-FFF2-40B4-BE49-F238E27FC236}">
-                <a16:creationId xmlns:a16="http://schemas.microsoft.com/office/drawing/2014/main" id="{C2EAA049-D54E-4D9D-B7B4-DB7642CFE65C}"/>
+                <a16:creationId xmlns:a16="http://schemas.microsoft.com/office/drawing/2014/main" id="{C772B4DF-BA4B-4C14-AF95-1EEDDB241BF0}"/>
               </a:ext>
             </a:extLst>
           </p:cNvPr>
@@ -9252,7 +9558,7 @@
           <p:cNvPr id="2" name="">
             <a:extLst xmlns:a="http://schemas.openxmlformats.org/drawingml/2006/main">
               <a:ext uri="{FF2B5EF4-FFF2-40B4-BE49-F238E27FC236}">
-                <a16:creationId xmlns:a16="http://schemas.microsoft.com/office/drawing/2014/main" id="{72DF6387-D6BB-4CEA-990C-0E825CF90666}"/>
+                <a16:creationId xmlns:a16="http://schemas.microsoft.com/office/drawing/2014/main" id="{558B5EED-4A8A-4101-81B5-A83ADD41E37B}"/>
               </a:ext>
             </a:extLst>
           </p:cNvPr>
@@ -9309,7 +9615,7 @@
           <p:cNvPr id="3" name="">
             <a:extLst xmlns:a="http://schemas.openxmlformats.org/drawingml/2006/main">
               <a:ext uri="{FF2B5EF4-FFF2-40B4-BE49-F238E27FC236}">
-                <a16:creationId xmlns:a16="http://schemas.microsoft.com/office/drawing/2014/main" id="{4A349AFF-96AD-4509-9FA0-371E0C71CCDF}"/>
+                <a16:creationId xmlns:a16="http://schemas.microsoft.com/office/drawing/2014/main" id="{C5C4AFA6-EC29-4BE0-BAE3-E4EEA20D7FE0}"/>
               </a:ext>
             </a:extLst>
           </p:cNvPr>
@@ -9341,7 +9647,7 @@
           <p:cNvPr id="4" name="">
             <a:extLst xmlns:a="http://schemas.openxmlformats.org/drawingml/2006/main">
               <a:ext uri="{FF2B5EF4-FFF2-40B4-BE49-F238E27FC236}">
-                <a16:creationId xmlns:a16="http://schemas.microsoft.com/office/drawing/2014/main" id="{9982B511-DE7F-433C-89B5-F8355E31171B}"/>
+                <a16:creationId xmlns:a16="http://schemas.microsoft.com/office/drawing/2014/main" id="{C01B7050-BEAB-45FF-8816-C1ACA119077F}"/>
               </a:ext>
             </a:extLst>
           </p:cNvPr>
@@ -9398,7 +9704,7 @@
           <p:cNvPr id="5" name="">
             <a:extLst xmlns:a="http://schemas.openxmlformats.org/drawingml/2006/main">
               <a:ext uri="{FF2B5EF4-FFF2-40B4-BE49-F238E27FC236}">
-                <a16:creationId xmlns:a16="http://schemas.microsoft.com/office/drawing/2014/main" id="{F1F4D322-80EB-44AA-BCC7-647CF3FAFFF1}"/>
+                <a16:creationId xmlns:a16="http://schemas.microsoft.com/office/drawing/2014/main" id="{CA8816EE-C832-4983-8F93-FB51D0689B9E}"/>
               </a:ext>
             </a:extLst>
           </p:cNvPr>
@@ -9455,7 +9761,7 @@
           <p:cNvPr id="6" name="">
             <a:extLst xmlns:a="http://schemas.openxmlformats.org/drawingml/2006/main">
               <a:ext uri="{FF2B5EF4-FFF2-40B4-BE49-F238E27FC236}">
-                <a16:creationId xmlns:a16="http://schemas.microsoft.com/office/drawing/2014/main" id="{FA23423C-A4EF-497B-9304-7AAE85458A59}"/>
+                <a16:creationId xmlns:a16="http://schemas.microsoft.com/office/drawing/2014/main" id="{D85B8C0C-FF90-41E4-846D-CE51A16FE44D}"/>
               </a:ext>
             </a:extLst>
           </p:cNvPr>
@@ -9512,7 +9818,7 @@
           <p:cNvPr id="7" name="">
             <a:extLst xmlns:a="http://schemas.openxmlformats.org/drawingml/2006/main">
               <a:ext uri="{FF2B5EF4-FFF2-40B4-BE49-F238E27FC236}">
-                <a16:creationId xmlns:a16="http://schemas.microsoft.com/office/drawing/2014/main" id="{181BF72D-23B7-415A-871B-DD91E446DA2D}"/>
+                <a16:creationId xmlns:a16="http://schemas.microsoft.com/office/drawing/2014/main" id="{3F2BBC21-D9DC-4ED5-B029-B388FB138C32}"/>
               </a:ext>
             </a:extLst>
           </p:cNvPr>
@@ -9544,7 +9850,7 @@
           <p:cNvPr id="8" name="">
             <a:extLst xmlns:a="http://schemas.openxmlformats.org/drawingml/2006/main">
               <a:ext uri="{FF2B5EF4-FFF2-40B4-BE49-F238E27FC236}">
-                <a16:creationId xmlns:a16="http://schemas.microsoft.com/office/drawing/2014/main" id="{B970C9A0-89E6-4510-81F9-7D58E4C61A35}"/>
+                <a16:creationId xmlns:a16="http://schemas.microsoft.com/office/drawing/2014/main" id="{030254FF-C60E-494E-90E5-5A8A9E9FEBCD}"/>
               </a:ext>
             </a:extLst>
           </p:cNvPr>
@@ -9601,7 +9907,7 @@
           <p:cNvPr id="9" name="">
             <a:extLst xmlns:a="http://schemas.openxmlformats.org/drawingml/2006/main">
               <a:ext uri="{FF2B5EF4-FFF2-40B4-BE49-F238E27FC236}">
-                <a16:creationId xmlns:a16="http://schemas.microsoft.com/office/drawing/2014/main" id="{7FF62862-4DD9-47A8-8C4A-98DE1B916F51}"/>
+                <a16:creationId xmlns:a16="http://schemas.microsoft.com/office/drawing/2014/main" id="{6D44CEC5-8DA1-4774-8F06-F6471F5293EF}"/>
               </a:ext>
             </a:extLst>
           </p:cNvPr>
@@ -9658,7 +9964,7 @@
           <p:cNvPr id="10" name="">
             <a:extLst xmlns:a="http://schemas.openxmlformats.org/drawingml/2006/main">
               <a:ext uri="{FF2B5EF4-FFF2-40B4-BE49-F238E27FC236}">
-                <a16:creationId xmlns:a16="http://schemas.microsoft.com/office/drawing/2014/main" id="{D58BCFF2-8A39-4646-B3F9-5A03B4AC94C7}"/>
+                <a16:creationId xmlns:a16="http://schemas.microsoft.com/office/drawing/2014/main" id="{D7DBCE1B-234A-4585-BA68-4A46F9DD271E}"/>
               </a:ext>
             </a:extLst>
           </p:cNvPr>
@@ -9715,7 +10021,7 @@
           <p:cNvPr id="11" name="">
             <a:extLst xmlns:a="http://schemas.openxmlformats.org/drawingml/2006/main">
               <a:ext uri="{FF2B5EF4-FFF2-40B4-BE49-F238E27FC236}">
-                <a16:creationId xmlns:a16="http://schemas.microsoft.com/office/drawing/2014/main" id="{A818996D-D721-4341-B291-A4F4450F633E}"/>
+                <a16:creationId xmlns:a16="http://schemas.microsoft.com/office/drawing/2014/main" id="{0B82207C-640A-4A0C-B2A8-51268826AF1F}"/>
               </a:ext>
             </a:extLst>
           </p:cNvPr>
@@ -9772,7 +10078,7 @@
           <p:cNvPr id="12" name="">
             <a:extLst xmlns:a="http://schemas.openxmlformats.org/drawingml/2006/main">
               <a:ext uri="{FF2B5EF4-FFF2-40B4-BE49-F238E27FC236}">
-                <a16:creationId xmlns:a16="http://schemas.microsoft.com/office/drawing/2014/main" id="{734780D0-FC2E-49F9-A7E5-2FDFE670547F}"/>
+                <a16:creationId xmlns:a16="http://schemas.microsoft.com/office/drawing/2014/main" id="{5F9A66CE-832A-43B1-AA24-D7F72E4DC85D}"/>
               </a:ext>
             </a:extLst>
           </p:cNvPr>
@@ -9804,7 +10110,7 @@
           <p:cNvPr id="13" name="">
             <a:extLst xmlns:a="http://schemas.openxmlformats.org/drawingml/2006/main">
               <a:ext uri="{FF2B5EF4-FFF2-40B4-BE49-F238E27FC236}">
-                <a16:creationId xmlns:a16="http://schemas.microsoft.com/office/drawing/2014/main" id="{02773D02-4452-43BB-8C32-6DCD439FA20A}"/>
+                <a16:creationId xmlns:a16="http://schemas.microsoft.com/office/drawing/2014/main" id="{C296AABA-148E-46A9-B978-A0F72B79439B}"/>
               </a:ext>
             </a:extLst>
           </p:cNvPr>
@@ -9861,7 +10167,7 @@
           <p:cNvPr id="14" name="">
             <a:extLst xmlns:a="http://schemas.openxmlformats.org/drawingml/2006/main">
               <a:ext uri="{FF2B5EF4-FFF2-40B4-BE49-F238E27FC236}">
-                <a16:creationId xmlns:a16="http://schemas.microsoft.com/office/drawing/2014/main" id="{7BC54002-4914-4BEA-B1DB-1FB28210F41A}"/>
+                <a16:creationId xmlns:a16="http://schemas.microsoft.com/office/drawing/2014/main" id="{BC97EC3D-4D51-496A-939E-4CD7F9C66E24}"/>
               </a:ext>
             </a:extLst>
           </p:cNvPr>
@@ -9916,7 +10222,7 @@
     </p:spTree>
     <p:extLst>
       <p:ext uri="{BB962C8B-B14F-4D97-AF65-F5344CB8AC3E}">
-        <p14:creationId xmlns:p14="http://schemas.microsoft.com/office/powerpoint/2010/main" val="883890001"/>
+        <p14:creationId xmlns:p14="http://schemas.microsoft.com/office/powerpoint/2010/main" val="2098996632"/>
       </p:ext>
     </p:extLst>
   </p:cSld>
@@ -10117,7 +10423,7 @@
           <p:cNvPr id="16" name="">
             <a:extLst xmlns:a="http://schemas.openxmlformats.org/drawingml/2006/main">
               <a:ext uri="{FF2B5EF4-FFF2-40B4-BE49-F238E27FC236}">
-                <a16:creationId xmlns:a16="http://schemas.microsoft.com/office/drawing/2014/main" id="{EB406F50-A601-41D5-BA97-029FE1506714}"/>
+                <a16:creationId xmlns:a16="http://schemas.microsoft.com/office/drawing/2014/main" id="{2E92D29F-E251-477F-85EA-3494545EDAE1}"/>
               </a:ext>
             </a:extLst>
           </p:cNvPr>
@@ -10149,7 +10455,7 @@
           <p:cNvPr id="2" name="">
             <a:extLst xmlns:a="http://schemas.openxmlformats.org/drawingml/2006/main">
               <a:ext uri="{FF2B5EF4-FFF2-40B4-BE49-F238E27FC236}">
-                <a16:creationId xmlns:a16="http://schemas.microsoft.com/office/drawing/2014/main" id="{38ED6451-04C3-423C-AFAF-A6439F5C8583}"/>
+                <a16:creationId xmlns:a16="http://schemas.microsoft.com/office/drawing/2014/main" id="{12D936AF-53F6-40D6-B1E8-930460110684}"/>
               </a:ext>
             </a:extLst>
           </p:cNvPr>
@@ -10206,7 +10512,7 @@
           <p:cNvPr id="3" name="">
             <a:extLst xmlns:a="http://schemas.openxmlformats.org/drawingml/2006/main">
               <a:ext uri="{FF2B5EF4-FFF2-40B4-BE49-F238E27FC236}">
-                <a16:creationId xmlns:a16="http://schemas.microsoft.com/office/drawing/2014/main" id="{3089A25E-D1D6-4289-8005-CAE8A1EE16D3}"/>
+                <a16:creationId xmlns:a16="http://schemas.microsoft.com/office/drawing/2014/main" id="{B96AF62A-68B0-4BEC-A28A-E323AF5162B9}"/>
               </a:ext>
             </a:extLst>
           </p:cNvPr>
@@ -10238,7 +10544,7 @@
           <p:cNvPr id="4" name="">
             <a:extLst xmlns:a="http://schemas.openxmlformats.org/drawingml/2006/main">
               <a:ext uri="{FF2B5EF4-FFF2-40B4-BE49-F238E27FC236}">
-                <a16:creationId xmlns:a16="http://schemas.microsoft.com/office/drawing/2014/main" id="{4EEE2A76-63E7-40FD-B852-44B4F010AA62}"/>
+                <a16:creationId xmlns:a16="http://schemas.microsoft.com/office/drawing/2014/main" id="{A4318035-428F-4E56-8D78-8E1B8EB75BCC}"/>
               </a:ext>
             </a:extLst>
           </p:cNvPr>
@@ -10295,7 +10601,7 @@
           <p:cNvPr id="5" name="">
             <a:extLst xmlns:a="http://schemas.openxmlformats.org/drawingml/2006/main">
               <a:ext uri="{FF2B5EF4-FFF2-40B4-BE49-F238E27FC236}">
-                <a16:creationId xmlns:a16="http://schemas.microsoft.com/office/drawing/2014/main" id="{19FBC1C0-2E23-4606-BEBC-003C79FE5BD6}"/>
+                <a16:creationId xmlns:a16="http://schemas.microsoft.com/office/drawing/2014/main" id="{9B2980E4-E9FC-4C65-A9F4-68ED02C7B24E}"/>
               </a:ext>
             </a:extLst>
           </p:cNvPr>
@@ -10352,7 +10658,7 @@
           <p:cNvPr id="6" name="">
             <a:extLst xmlns:a="http://schemas.openxmlformats.org/drawingml/2006/main">
               <a:ext uri="{FF2B5EF4-FFF2-40B4-BE49-F238E27FC236}">
-                <a16:creationId xmlns:a16="http://schemas.microsoft.com/office/drawing/2014/main" id="{7E601D30-45B1-43C9-9BCD-702622A14CCE}"/>
+                <a16:creationId xmlns:a16="http://schemas.microsoft.com/office/drawing/2014/main" id="{28221562-9118-4F7E-89CF-0F14A0C3837B}"/>
               </a:ext>
             </a:extLst>
           </p:cNvPr>
@@ -10409,7 +10715,7 @@
           <p:cNvPr id="7" name="">
             <a:extLst xmlns:a="http://schemas.openxmlformats.org/drawingml/2006/main">
               <a:ext uri="{FF2B5EF4-FFF2-40B4-BE49-F238E27FC236}">
-                <a16:creationId xmlns:a16="http://schemas.microsoft.com/office/drawing/2014/main" id="{911D2579-F110-4D9A-94F1-FB94EFACD366}"/>
+                <a16:creationId xmlns:a16="http://schemas.microsoft.com/office/drawing/2014/main" id="{68C4702C-745A-4A8C-B4D5-3278B74DB71B}"/>
               </a:ext>
             </a:extLst>
           </p:cNvPr>
@@ -10441,7 +10747,7 @@
           <p:cNvPr id="8" name="">
             <a:extLst xmlns:a="http://schemas.openxmlformats.org/drawingml/2006/main">
               <a:ext uri="{FF2B5EF4-FFF2-40B4-BE49-F238E27FC236}">
-                <a16:creationId xmlns:a16="http://schemas.microsoft.com/office/drawing/2014/main" id="{D7C15BE3-10DA-4E9F-AA84-6B305FA9F9D2}"/>
+                <a16:creationId xmlns:a16="http://schemas.microsoft.com/office/drawing/2014/main" id="{ECB8F845-6452-4E77-97B6-820B9B2C02D8}"/>
               </a:ext>
             </a:extLst>
           </p:cNvPr>
@@ -10498,7 +10804,7 @@
           <p:cNvPr id="9" name="">
             <a:extLst xmlns:a="http://schemas.openxmlformats.org/drawingml/2006/main">
               <a:ext uri="{FF2B5EF4-FFF2-40B4-BE49-F238E27FC236}">
-                <a16:creationId xmlns:a16="http://schemas.microsoft.com/office/drawing/2014/main" id="{3AE79EFC-7775-44B8-A266-23BAD434940E}"/>
+                <a16:creationId xmlns:a16="http://schemas.microsoft.com/office/drawing/2014/main" id="{724AA692-C5D4-4B9D-9FC4-C0F7900727D0}"/>
               </a:ext>
             </a:extLst>
           </p:cNvPr>
@@ -10555,7 +10861,7 @@
           <p:cNvPr id="10" name="">
             <a:extLst xmlns:a="http://schemas.openxmlformats.org/drawingml/2006/main">
               <a:ext uri="{FF2B5EF4-FFF2-40B4-BE49-F238E27FC236}">
-                <a16:creationId xmlns:a16="http://schemas.microsoft.com/office/drawing/2014/main" id="{738D59A4-9EEE-46A2-98E1-FFBB9EB64F41}"/>
+                <a16:creationId xmlns:a16="http://schemas.microsoft.com/office/drawing/2014/main" id="{4536B506-0EF6-4EB0-8E5D-0ECD19D9F7C1}"/>
               </a:ext>
             </a:extLst>
           </p:cNvPr>
@@ -10612,7 +10918,7 @@
           <p:cNvPr id="11" name="">
             <a:extLst xmlns:a="http://schemas.openxmlformats.org/drawingml/2006/main">
               <a:ext uri="{FF2B5EF4-FFF2-40B4-BE49-F238E27FC236}">
-                <a16:creationId xmlns:a16="http://schemas.microsoft.com/office/drawing/2014/main" id="{01CBA501-EFD9-4616-9675-BDD519494598}"/>
+                <a16:creationId xmlns:a16="http://schemas.microsoft.com/office/drawing/2014/main" id="{712048A6-2E3A-4852-B408-D4AA16B1917D}"/>
               </a:ext>
             </a:extLst>
           </p:cNvPr>
@@ -10669,7 +10975,7 @@
           <p:cNvPr id="12" name="">
             <a:extLst xmlns:a="http://schemas.openxmlformats.org/drawingml/2006/main">
               <a:ext uri="{FF2B5EF4-FFF2-40B4-BE49-F238E27FC236}">
-                <a16:creationId xmlns:a16="http://schemas.microsoft.com/office/drawing/2014/main" id="{BC2C887C-6AEA-4CCA-B0B7-75DDCC5660AD}"/>
+                <a16:creationId xmlns:a16="http://schemas.microsoft.com/office/drawing/2014/main" id="{656BAB02-6E6F-4649-83B4-54CA42181B6B}"/>
               </a:ext>
             </a:extLst>
           </p:cNvPr>
@@ -10726,7 +11032,7 @@
           <p:cNvPr id="13" name="">
             <a:extLst xmlns:a="http://schemas.openxmlformats.org/drawingml/2006/main">
               <a:ext uri="{FF2B5EF4-FFF2-40B4-BE49-F238E27FC236}">
-                <a16:creationId xmlns:a16="http://schemas.microsoft.com/office/drawing/2014/main" id="{AF9888BE-2009-4DEB-973E-C3D1FEB71BD6}"/>
+                <a16:creationId xmlns:a16="http://schemas.microsoft.com/office/drawing/2014/main" id="{ADEDE9EA-A787-4FC6-B348-7122C5B04118}"/>
               </a:ext>
             </a:extLst>
           </p:cNvPr>
@@ -10783,7 +11089,7 @@
           <p:cNvPr id="14" name="">
             <a:extLst xmlns:a="http://schemas.openxmlformats.org/drawingml/2006/main">
               <a:ext uri="{FF2B5EF4-FFF2-40B4-BE49-F238E27FC236}">
-                <a16:creationId xmlns:a16="http://schemas.microsoft.com/office/drawing/2014/main" id="{A62E7E4E-2777-44F6-A255-5BBF6C5F24C4}"/>
+                <a16:creationId xmlns:a16="http://schemas.microsoft.com/office/drawing/2014/main" id="{52A9797D-821A-48A2-9A14-6C4F8328F312}"/>
               </a:ext>
             </a:extLst>
           </p:cNvPr>
@@ -10840,7 +11146,7 @@
           <p:cNvPr id="15" name="">
             <a:extLst xmlns:a="http://schemas.openxmlformats.org/drawingml/2006/main">
               <a:ext uri="{FF2B5EF4-FFF2-40B4-BE49-F238E27FC236}">
-                <a16:creationId xmlns:a16="http://schemas.microsoft.com/office/drawing/2014/main" id="{C57B757B-AC31-4408-B661-56609050F10E}"/>
+                <a16:creationId xmlns:a16="http://schemas.microsoft.com/office/drawing/2014/main" id="{31E20BAC-2A2A-4B30-B2EC-EA00493B8106}"/>
               </a:ext>
             </a:extLst>
           </p:cNvPr>
@@ -10895,7 +11201,7 @@
     </p:spTree>
     <p:extLst>
       <p:ext uri="{BB962C8B-B14F-4D97-AF65-F5344CB8AC3E}">
-        <p14:creationId xmlns:p14="http://schemas.microsoft.com/office/powerpoint/2010/main" val="1357162582"/>
+        <p14:creationId xmlns:p14="http://schemas.microsoft.com/office/powerpoint/2010/main" val="1371306962"/>
       </p:ext>
     </p:extLst>
   </p:cSld>
@@ -11050,7 +11356,7 @@
           <p:cNvPr id="16" name="">
             <a:extLst xmlns:a="http://schemas.openxmlformats.org/drawingml/2006/main">
               <a:ext uri="{FF2B5EF4-FFF2-40B4-BE49-F238E27FC236}">
-                <a16:creationId xmlns:a16="http://schemas.microsoft.com/office/drawing/2014/main" id="{A76C3435-B2E1-4958-91E8-3BFD887E8E5D}"/>
+                <a16:creationId xmlns:a16="http://schemas.microsoft.com/office/drawing/2014/main" id="{3737F605-C5E1-49A2-81E1-B875117B5315}"/>
               </a:ext>
             </a:extLst>
           </p:cNvPr>
@@ -11082,7 +11388,7 @@
           <p:cNvPr id="2" name="">
             <a:extLst xmlns:a="http://schemas.openxmlformats.org/drawingml/2006/main">
               <a:ext uri="{FF2B5EF4-FFF2-40B4-BE49-F238E27FC236}">
-                <a16:creationId xmlns:a16="http://schemas.microsoft.com/office/drawing/2014/main" id="{15E74E35-8CA4-421B-8608-708BF85B9FE0}"/>
+                <a16:creationId xmlns:a16="http://schemas.microsoft.com/office/drawing/2014/main" id="{DA76A15D-F5A1-45B8-9306-3CE28BC13162}"/>
               </a:ext>
             </a:extLst>
           </p:cNvPr>
@@ -11139,7 +11445,7 @@
           <p:cNvPr id="3" name="">
             <a:extLst xmlns:a="http://schemas.openxmlformats.org/drawingml/2006/main">
               <a:ext uri="{FF2B5EF4-FFF2-40B4-BE49-F238E27FC236}">
-                <a16:creationId xmlns:a16="http://schemas.microsoft.com/office/drawing/2014/main" id="{CFD271A2-7638-4D04-99B8-623001DDDE78}"/>
+                <a16:creationId xmlns:a16="http://schemas.microsoft.com/office/drawing/2014/main" id="{F5A7B30B-F1BE-48BF-9053-0E2CEB212D71}"/>
               </a:ext>
             </a:extLst>
           </p:cNvPr>
@@ -11171,7 +11477,7 @@
           <p:cNvPr id="4" name="">
             <a:extLst xmlns:a="http://schemas.openxmlformats.org/drawingml/2006/main">
               <a:ext uri="{FF2B5EF4-FFF2-40B4-BE49-F238E27FC236}">
-                <a16:creationId xmlns:a16="http://schemas.microsoft.com/office/drawing/2014/main" id="{DAD40DC8-866D-46FF-9031-B7CE6F64EF00}"/>
+                <a16:creationId xmlns:a16="http://schemas.microsoft.com/office/drawing/2014/main" id="{9BA9B9D4-4037-48FE-A6AF-D7934222C3FE}"/>
               </a:ext>
             </a:extLst>
           </p:cNvPr>
@@ -11228,7 +11534,7 @@
           <p:cNvPr id="5" name="">
             <a:extLst xmlns:a="http://schemas.openxmlformats.org/drawingml/2006/main">
               <a:ext uri="{FF2B5EF4-FFF2-40B4-BE49-F238E27FC236}">
-                <a16:creationId xmlns:a16="http://schemas.microsoft.com/office/drawing/2014/main" id="{E470F09F-EDA3-4401-810B-270C980AAE9B}"/>
+                <a16:creationId xmlns:a16="http://schemas.microsoft.com/office/drawing/2014/main" id="{8122EE4B-6DB6-4854-B5D7-E136B970CF85}"/>
               </a:ext>
             </a:extLst>
           </p:cNvPr>
@@ -11285,7 +11591,7 @@
           <p:cNvPr id="6" name="">
             <a:extLst xmlns:a="http://schemas.openxmlformats.org/drawingml/2006/main">
               <a:ext uri="{FF2B5EF4-FFF2-40B4-BE49-F238E27FC236}">
-                <a16:creationId xmlns:a16="http://schemas.microsoft.com/office/drawing/2014/main" id="{F838C0B5-78F7-427E-9CA5-27378827B05C}"/>
+                <a16:creationId xmlns:a16="http://schemas.microsoft.com/office/drawing/2014/main" id="{D776FDB1-6C12-4712-B62D-34C83571FBA6}"/>
               </a:ext>
             </a:extLst>
           </p:cNvPr>
@@ -11342,7 +11648,7 @@
           <p:cNvPr id="7" name="">
             <a:extLst xmlns:a="http://schemas.openxmlformats.org/drawingml/2006/main">
               <a:ext uri="{FF2B5EF4-FFF2-40B4-BE49-F238E27FC236}">
-                <a16:creationId xmlns:a16="http://schemas.microsoft.com/office/drawing/2014/main" id="{A9D20204-33C6-4FCC-83AA-A5BC434DF47B}"/>
+                <a16:creationId xmlns:a16="http://schemas.microsoft.com/office/drawing/2014/main" id="{ECE9B186-C82F-4E94-A9FE-FF8E9349F0E5}"/>
               </a:ext>
             </a:extLst>
           </p:cNvPr>
@@ -11374,7 +11680,7 @@
           <p:cNvPr id="8" name="">
             <a:extLst xmlns:a="http://schemas.openxmlformats.org/drawingml/2006/main">
               <a:ext uri="{FF2B5EF4-FFF2-40B4-BE49-F238E27FC236}">
-                <a16:creationId xmlns:a16="http://schemas.microsoft.com/office/drawing/2014/main" id="{468B8D4D-D223-4284-9C32-96B005004EE7}"/>
+                <a16:creationId xmlns:a16="http://schemas.microsoft.com/office/drawing/2014/main" id="{A2ADD0F4-96FC-496F-9E10-65F0AAA0CD97}"/>
               </a:ext>
             </a:extLst>
           </p:cNvPr>
@@ -11431,7 +11737,7 @@
           <p:cNvPr id="9" name="">
             <a:extLst xmlns:a="http://schemas.openxmlformats.org/drawingml/2006/main">
               <a:ext uri="{FF2B5EF4-FFF2-40B4-BE49-F238E27FC236}">
-                <a16:creationId xmlns:a16="http://schemas.microsoft.com/office/drawing/2014/main" id="{CF15290C-6A33-477A-A7D7-FEA2FFBBB2F5}"/>
+                <a16:creationId xmlns:a16="http://schemas.microsoft.com/office/drawing/2014/main" id="{A7FE7CD8-E3FC-44CD-BA66-8822358FB57F}"/>
               </a:ext>
             </a:extLst>
           </p:cNvPr>
@@ -11492,7 +11798,7 @@
           <p:nvPr/>
         </p:nvPicPr>
         <p:blipFill>
-          <a:blip xmlns:r="http://schemas.openxmlformats.org/officeDocument/2006/relationships" xmlns:a="http://schemas.openxmlformats.org/drawingml/2006/main" r:embed="R0dd78348b79e41ba"/>
+          <a:blip xmlns:r="http://schemas.openxmlformats.org/officeDocument/2006/relationships" xmlns:a="http://schemas.openxmlformats.org/drawingml/2006/main" r:embed="R64101331ccc84039"/>
           <a:stretch xmlns:a="http://schemas.openxmlformats.org/drawingml/2006/main"/>
         </p:blipFill>
         <p:spPr>
@@ -11510,7 +11816,7 @@
           <p:cNvPr id="11" name="">
             <a:extLst xmlns:a="http://schemas.openxmlformats.org/drawingml/2006/main">
               <a:ext uri="{FF2B5EF4-FFF2-40B4-BE49-F238E27FC236}">
-                <a16:creationId xmlns:a16="http://schemas.microsoft.com/office/drawing/2014/main" id="{66E6CC08-3E9D-4FA1-B044-F8C357FBC75A}"/>
+                <a16:creationId xmlns:a16="http://schemas.microsoft.com/office/drawing/2014/main" id="{6B6C3A2B-9743-4B4B-ABD0-D1C42DA500BC}"/>
               </a:ext>
             </a:extLst>
           </p:cNvPr>
@@ -11567,7 +11873,7 @@
           <p:cNvPr id="12" name="">
             <a:extLst xmlns:a="http://schemas.openxmlformats.org/drawingml/2006/main">
               <a:ext uri="{FF2B5EF4-FFF2-40B4-BE49-F238E27FC236}">
-                <a16:creationId xmlns:a16="http://schemas.microsoft.com/office/drawing/2014/main" id="{0B1E873C-9CEB-443A-BB8B-1E25F119C302}"/>
+                <a16:creationId xmlns:a16="http://schemas.microsoft.com/office/drawing/2014/main" id="{D4B63DD1-A20E-4E08-B0D4-435C14C268B2}"/>
               </a:ext>
             </a:extLst>
           </p:cNvPr>
@@ -11624,7 +11930,7 @@
           <p:cNvPr id="13" name="">
             <a:extLst xmlns:a="http://schemas.openxmlformats.org/drawingml/2006/main">
               <a:ext uri="{FF2B5EF4-FFF2-40B4-BE49-F238E27FC236}">
-                <a16:creationId xmlns:a16="http://schemas.microsoft.com/office/drawing/2014/main" id="{E64C5ECB-58C2-4A24-9767-5E7452685C45}"/>
+                <a16:creationId xmlns:a16="http://schemas.microsoft.com/office/drawing/2014/main" id="{E55ADD0A-0CC5-4402-A7C9-73BA824AA37C}"/>
               </a:ext>
             </a:extLst>
           </p:cNvPr>
@@ -11656,7 +11962,7 @@
           <p:cNvPr id="14" name="">
             <a:extLst xmlns:a="http://schemas.openxmlformats.org/drawingml/2006/main">
               <a:ext uri="{FF2B5EF4-FFF2-40B4-BE49-F238E27FC236}">
-                <a16:creationId xmlns:a16="http://schemas.microsoft.com/office/drawing/2014/main" id="{3B0B9459-5B46-4AE8-86B0-44B3E3E5C542}"/>
+                <a16:creationId xmlns:a16="http://schemas.microsoft.com/office/drawing/2014/main" id="{08FAF16F-D5F3-482F-93C4-1985DA751BB3}"/>
               </a:ext>
             </a:extLst>
           </p:cNvPr>
@@ -11713,7 +12019,7 @@
           <p:cNvPr id="15" name="">
             <a:extLst xmlns:a="http://schemas.openxmlformats.org/drawingml/2006/main">
               <a:ext uri="{FF2B5EF4-FFF2-40B4-BE49-F238E27FC236}">
-                <a16:creationId xmlns:a16="http://schemas.microsoft.com/office/drawing/2014/main" id="{7D20A62E-F4AF-4DDC-A9B0-A8E58F053F21}"/>
+                <a16:creationId xmlns:a16="http://schemas.microsoft.com/office/drawing/2014/main" id="{010B526C-08B5-4F76-BC48-5D8436FDFEB8}"/>
               </a:ext>
             </a:extLst>
           </p:cNvPr>
@@ -11768,7 +12074,7 @@
     </p:spTree>
     <p:extLst>
       <p:ext uri="{BB962C8B-B14F-4D97-AF65-F5344CB8AC3E}">
-        <p14:creationId xmlns:p14="http://schemas.microsoft.com/office/powerpoint/2010/main" val="2025547064"/>
+        <p14:creationId xmlns:p14="http://schemas.microsoft.com/office/powerpoint/2010/main" val="937192246"/>
       </p:ext>
     </p:extLst>
   </p:cSld>
@@ -11923,7 +12229,7 @@
           <p:cNvPr id="23" name="">
             <a:extLst xmlns:a="http://schemas.openxmlformats.org/drawingml/2006/main">
               <a:ext uri="{FF2B5EF4-FFF2-40B4-BE49-F238E27FC236}">
-                <a16:creationId xmlns:a16="http://schemas.microsoft.com/office/drawing/2014/main" id="{073649F4-B8FE-4D7A-A109-2787D77A934F}"/>
+                <a16:creationId xmlns:a16="http://schemas.microsoft.com/office/drawing/2014/main" id="{03D04843-5AD5-4A9D-82C3-8B1589FB9887}"/>
               </a:ext>
             </a:extLst>
           </p:cNvPr>
@@ -11955,7 +12261,7 @@
           <p:cNvPr id="2" name="">
             <a:extLst xmlns:a="http://schemas.openxmlformats.org/drawingml/2006/main">
               <a:ext uri="{FF2B5EF4-FFF2-40B4-BE49-F238E27FC236}">
-                <a16:creationId xmlns:a16="http://schemas.microsoft.com/office/drawing/2014/main" id="{63D54F95-F980-482C-9A55-BD7D396139AF}"/>
+                <a16:creationId xmlns:a16="http://schemas.microsoft.com/office/drawing/2014/main" id="{7749C8D1-12ED-46B1-BA91-D18570C2510A}"/>
               </a:ext>
             </a:extLst>
           </p:cNvPr>
@@ -12012,7 +12318,7 @@
           <p:cNvPr id="3" name="">
             <a:extLst xmlns:a="http://schemas.openxmlformats.org/drawingml/2006/main">
               <a:ext uri="{FF2B5EF4-FFF2-40B4-BE49-F238E27FC236}">
-                <a16:creationId xmlns:a16="http://schemas.microsoft.com/office/drawing/2014/main" id="{A648920D-EA32-46E3-B097-E06C1F95EBDA}"/>
+                <a16:creationId xmlns:a16="http://schemas.microsoft.com/office/drawing/2014/main" id="{3219E56D-5972-4CC6-9501-F7981AFEB503}"/>
               </a:ext>
             </a:extLst>
           </p:cNvPr>
@@ -12044,7 +12350,7 @@
           <p:cNvPr id="4" name="">
             <a:extLst xmlns:a="http://schemas.openxmlformats.org/drawingml/2006/main">
               <a:ext uri="{FF2B5EF4-FFF2-40B4-BE49-F238E27FC236}">
-                <a16:creationId xmlns:a16="http://schemas.microsoft.com/office/drawing/2014/main" id="{62D84EB6-9CED-4ADB-B92F-21C9A8257D87}"/>
+                <a16:creationId xmlns:a16="http://schemas.microsoft.com/office/drawing/2014/main" id="{B5EBB94F-526A-4A77-BD69-5EFBCFADDF39}"/>
               </a:ext>
             </a:extLst>
           </p:cNvPr>
@@ -12101,7 +12407,7 @@
           <p:cNvPr id="5" name="">
             <a:extLst xmlns:a="http://schemas.openxmlformats.org/drawingml/2006/main">
               <a:ext uri="{FF2B5EF4-FFF2-40B4-BE49-F238E27FC236}">
-                <a16:creationId xmlns:a16="http://schemas.microsoft.com/office/drawing/2014/main" id="{FF7B711D-24BE-4ABC-944F-E1B1C042A35F}"/>
+                <a16:creationId xmlns:a16="http://schemas.microsoft.com/office/drawing/2014/main" id="{374D8A12-BF90-42D4-9305-9A5DC585731D}"/>
               </a:ext>
             </a:extLst>
           </p:cNvPr>
@@ -12158,7 +12464,7 @@
           <p:cNvPr id="6" name="">
             <a:extLst xmlns:a="http://schemas.openxmlformats.org/drawingml/2006/main">
               <a:ext uri="{FF2B5EF4-FFF2-40B4-BE49-F238E27FC236}">
-                <a16:creationId xmlns:a16="http://schemas.microsoft.com/office/drawing/2014/main" id="{A08373BD-F251-484D-8FF2-4FC1B852FE58}"/>
+                <a16:creationId xmlns:a16="http://schemas.microsoft.com/office/drawing/2014/main" id="{AD9341F3-CA85-4DF6-9DA9-97ACBB3F8065}"/>
               </a:ext>
             </a:extLst>
           </p:cNvPr>
@@ -12215,7 +12521,7 @@
           <p:cNvPr id="7" name="">
             <a:extLst xmlns:a="http://schemas.openxmlformats.org/drawingml/2006/main">
               <a:ext uri="{FF2B5EF4-FFF2-40B4-BE49-F238E27FC236}">
-                <a16:creationId xmlns:a16="http://schemas.microsoft.com/office/drawing/2014/main" id="{A7D8FC92-0489-43B7-83BB-F4144080FE90}"/>
+                <a16:creationId xmlns:a16="http://schemas.microsoft.com/office/drawing/2014/main" id="{AA1D1957-69EC-4A6D-8E0E-5C06B460055F}"/>
               </a:ext>
             </a:extLst>
           </p:cNvPr>
@@ -12247,7 +12553,7 @@
           <p:cNvPr id="8" name="">
             <a:extLst xmlns:a="http://schemas.openxmlformats.org/drawingml/2006/main">
               <a:ext uri="{FF2B5EF4-FFF2-40B4-BE49-F238E27FC236}">
-                <a16:creationId xmlns:a16="http://schemas.microsoft.com/office/drawing/2014/main" id="{F4B93B72-F4F8-485C-BA2E-CCC95C7C966B}"/>
+                <a16:creationId xmlns:a16="http://schemas.microsoft.com/office/drawing/2014/main" id="{0F3AB5ED-0455-481C-84E1-AC4937CA5128}"/>
               </a:ext>
             </a:extLst>
           </p:cNvPr>
@@ -12304,7 +12610,7 @@
           <p:cNvPr id="9" name="">
             <a:extLst xmlns:a="http://schemas.openxmlformats.org/drawingml/2006/main">
               <a:ext uri="{FF2B5EF4-FFF2-40B4-BE49-F238E27FC236}">
-                <a16:creationId xmlns:a16="http://schemas.microsoft.com/office/drawing/2014/main" id="{D76671A5-2FEE-4200-B16C-0BF88206CB26}"/>
+                <a16:creationId xmlns:a16="http://schemas.microsoft.com/office/drawing/2014/main" id="{FAB9DB67-67A1-4B9E-92E7-580701E3A053}"/>
               </a:ext>
             </a:extLst>
           </p:cNvPr>
@@ -12361,7 +12667,7 @@
           <p:cNvPr id="10" name="">
             <a:extLst xmlns:a="http://schemas.openxmlformats.org/drawingml/2006/main">
               <a:ext uri="{FF2B5EF4-FFF2-40B4-BE49-F238E27FC236}">
-                <a16:creationId xmlns:a16="http://schemas.microsoft.com/office/drawing/2014/main" id="{7BE89348-104D-4E97-BF5E-576A902D3F0B}"/>
+                <a16:creationId xmlns:a16="http://schemas.microsoft.com/office/drawing/2014/main" id="{6627289B-C401-45A9-B0A2-8D079F35253F}"/>
               </a:ext>
             </a:extLst>
           </p:cNvPr>
@@ -12395,7 +12701,7 @@
           <p:cNvPr id="11" name="">
             <a:extLst xmlns:a="http://schemas.openxmlformats.org/drawingml/2006/main">
               <a:ext uri="{FF2B5EF4-FFF2-40B4-BE49-F238E27FC236}">
-                <a16:creationId xmlns:a16="http://schemas.microsoft.com/office/drawing/2014/main" id="{68ABE64D-B63B-422B-AECB-97774B856314}"/>
+                <a16:creationId xmlns:a16="http://schemas.microsoft.com/office/drawing/2014/main" id="{53339506-43DF-4066-B8E8-0F95C48BFD51}"/>
               </a:ext>
             </a:extLst>
           </p:cNvPr>
@@ -12427,7 +12733,7 @@
           <p:cNvPr id="12" name="">
             <a:extLst xmlns:a="http://schemas.openxmlformats.org/drawingml/2006/main">
               <a:ext uri="{FF2B5EF4-FFF2-40B4-BE49-F238E27FC236}">
-                <a16:creationId xmlns:a16="http://schemas.microsoft.com/office/drawing/2014/main" id="{5A07F8D9-346E-4A79-8900-9B619958A765}"/>
+                <a16:creationId xmlns:a16="http://schemas.microsoft.com/office/drawing/2014/main" id="{446B9E8C-F34C-4959-A3AE-F54F89495345}"/>
               </a:ext>
             </a:extLst>
           </p:cNvPr>
@@ -12484,7 +12790,7 @@
           <p:cNvPr id="13" name="">
             <a:extLst xmlns:a="http://schemas.openxmlformats.org/drawingml/2006/main">
               <a:ext uri="{FF2B5EF4-FFF2-40B4-BE49-F238E27FC236}">
-                <a16:creationId xmlns:a16="http://schemas.microsoft.com/office/drawing/2014/main" id="{6A8CBE2F-93BE-4E0E-BB3E-5A7760AFDA5B}"/>
+                <a16:creationId xmlns:a16="http://schemas.microsoft.com/office/drawing/2014/main" id="{D35D170C-1584-4BD5-9A6D-B4081312EDCC}"/>
               </a:ext>
             </a:extLst>
           </p:cNvPr>
@@ -12541,7 +12847,7 @@
           <p:cNvPr id="14" name="">
             <a:extLst xmlns:a="http://schemas.openxmlformats.org/drawingml/2006/main">
               <a:ext uri="{FF2B5EF4-FFF2-40B4-BE49-F238E27FC236}">
-                <a16:creationId xmlns:a16="http://schemas.microsoft.com/office/drawing/2014/main" id="{A9B2F5C6-5FB8-404C-8649-C04211229601}"/>
+                <a16:creationId xmlns:a16="http://schemas.microsoft.com/office/drawing/2014/main" id="{7EAFFD9E-83B7-4CB1-8B28-2BAB4756D1D1}"/>
               </a:ext>
             </a:extLst>
           </p:cNvPr>
@@ -12575,7 +12881,7 @@
           <p:cNvPr id="15" name="">
             <a:extLst xmlns:a="http://schemas.openxmlformats.org/drawingml/2006/main">
               <a:ext uri="{FF2B5EF4-FFF2-40B4-BE49-F238E27FC236}">
-                <a16:creationId xmlns:a16="http://schemas.microsoft.com/office/drawing/2014/main" id="{B7D8E403-ED34-4FCA-91DF-D757625B7126}"/>
+                <a16:creationId xmlns:a16="http://schemas.microsoft.com/office/drawing/2014/main" id="{FCE3A16B-517A-4E71-B44F-CA9FD6B54302}"/>
               </a:ext>
             </a:extLst>
           </p:cNvPr>
@@ -12607,7 +12913,7 @@
           <p:cNvPr id="16" name="">
             <a:extLst xmlns:a="http://schemas.openxmlformats.org/drawingml/2006/main">
               <a:ext uri="{FF2B5EF4-FFF2-40B4-BE49-F238E27FC236}">
-                <a16:creationId xmlns:a16="http://schemas.microsoft.com/office/drawing/2014/main" id="{86BA3764-BB2B-4491-98CC-01B350522882}"/>
+                <a16:creationId xmlns:a16="http://schemas.microsoft.com/office/drawing/2014/main" id="{37F3AB23-E6AF-4369-8BEB-1F8519ECF807}"/>
               </a:ext>
             </a:extLst>
           </p:cNvPr>
@@ -12664,7 +12970,7 @@
           <p:cNvPr id="17" name="">
             <a:extLst xmlns:a="http://schemas.openxmlformats.org/drawingml/2006/main">
               <a:ext uri="{FF2B5EF4-FFF2-40B4-BE49-F238E27FC236}">
-                <a16:creationId xmlns:a16="http://schemas.microsoft.com/office/drawing/2014/main" id="{6C5B529E-D411-4F1A-8EAE-213F809FF0DD}"/>
+                <a16:creationId xmlns:a16="http://schemas.microsoft.com/office/drawing/2014/main" id="{60549451-2701-4FE8-82C8-99D2AEFAD042}"/>
               </a:ext>
             </a:extLst>
           </p:cNvPr>
@@ -12721,7 +13027,7 @@
           <p:cNvPr id="18" name="">
             <a:extLst xmlns:a="http://schemas.openxmlformats.org/drawingml/2006/main">
               <a:ext uri="{FF2B5EF4-FFF2-40B4-BE49-F238E27FC236}">
-                <a16:creationId xmlns:a16="http://schemas.microsoft.com/office/drawing/2014/main" id="{833A205E-D9CE-45D1-AC5D-402EAB82D6B9}"/>
+                <a16:creationId xmlns:a16="http://schemas.microsoft.com/office/drawing/2014/main" id="{A1025406-ECCF-4044-A54B-6CEE1C99BA3C}"/>
               </a:ext>
             </a:extLst>
           </p:cNvPr>
@@ -12755,7 +13061,7 @@
           <p:cNvPr id="19" name="">
             <a:extLst xmlns:a="http://schemas.openxmlformats.org/drawingml/2006/main">
               <a:ext uri="{FF2B5EF4-FFF2-40B4-BE49-F238E27FC236}">
-                <a16:creationId xmlns:a16="http://schemas.microsoft.com/office/drawing/2014/main" id="{CE6183E0-15F9-4101-9C75-9031878579C4}"/>
+                <a16:creationId xmlns:a16="http://schemas.microsoft.com/office/drawing/2014/main" id="{A966D1A8-3240-445F-BA42-65328BB4665B}"/>
               </a:ext>
             </a:extLst>
           </p:cNvPr>
@@ -12787,7 +13093,7 @@
           <p:cNvPr id="20" name="">
             <a:extLst xmlns:a="http://schemas.openxmlformats.org/drawingml/2006/main">
               <a:ext uri="{FF2B5EF4-FFF2-40B4-BE49-F238E27FC236}">
-                <a16:creationId xmlns:a16="http://schemas.microsoft.com/office/drawing/2014/main" id="{E6504C16-9CAC-43EB-B9BA-75CB21A1DAAB}"/>
+                <a16:creationId xmlns:a16="http://schemas.microsoft.com/office/drawing/2014/main" id="{5ADB9311-0105-4283-80B6-CD42EFC2A3AE}"/>
               </a:ext>
             </a:extLst>
           </p:cNvPr>
@@ -12844,7 +13150,7 @@
           <p:cNvPr id="21" name="">
             <a:extLst xmlns:a="http://schemas.openxmlformats.org/drawingml/2006/main">
               <a:ext uri="{FF2B5EF4-FFF2-40B4-BE49-F238E27FC236}">
-                <a16:creationId xmlns:a16="http://schemas.microsoft.com/office/drawing/2014/main" id="{E354E8F2-A42D-4A42-A36C-3EAB0599AE22}"/>
+                <a16:creationId xmlns:a16="http://schemas.microsoft.com/office/drawing/2014/main" id="{4543BE48-43C3-4847-95C8-01CFC53AF698}"/>
               </a:ext>
             </a:extLst>
           </p:cNvPr>
@@ -12901,7 +13207,7 @@
           <p:cNvPr id="22" name="">
             <a:extLst xmlns:a="http://schemas.openxmlformats.org/drawingml/2006/main">
               <a:ext uri="{FF2B5EF4-FFF2-40B4-BE49-F238E27FC236}">
-                <a16:creationId xmlns:a16="http://schemas.microsoft.com/office/drawing/2014/main" id="{F857D306-E090-4C6F-9AAF-1F63A21119E5}"/>
+                <a16:creationId xmlns:a16="http://schemas.microsoft.com/office/drawing/2014/main" id="{948FB32B-3D3E-4A8C-8A7A-240A44151E1D}"/>
               </a:ext>
             </a:extLst>
           </p:cNvPr>
@@ -12956,7 +13262,7 @@
     </p:spTree>
     <p:extLst>
       <p:ext uri="{BB962C8B-B14F-4D97-AF65-F5344CB8AC3E}">
-        <p14:creationId xmlns:p14="http://schemas.microsoft.com/office/powerpoint/2010/main" val="520141678"/>
+        <p14:creationId xmlns:p14="http://schemas.microsoft.com/office/powerpoint/2010/main" val="1192780866"/>
       </p:ext>
     </p:extLst>
   </p:cSld>
@@ -13157,7 +13463,7 @@
           <p:cNvPr id="22" name="">
             <a:extLst xmlns:a="http://schemas.openxmlformats.org/drawingml/2006/main">
               <a:ext uri="{FF2B5EF4-FFF2-40B4-BE49-F238E27FC236}">
-                <a16:creationId xmlns:a16="http://schemas.microsoft.com/office/drawing/2014/main" id="{D9097BEC-4FD9-4772-A4E3-A4F5BDCD073F}"/>
+                <a16:creationId xmlns:a16="http://schemas.microsoft.com/office/drawing/2014/main" id="{85B8EFDD-420C-4BA0-BC12-F1DC16BEB77B}"/>
               </a:ext>
             </a:extLst>
           </p:cNvPr>
@@ -13189,7 +13495,7 @@
           <p:cNvPr id="2" name="">
             <a:extLst xmlns:a="http://schemas.openxmlformats.org/drawingml/2006/main">
               <a:ext uri="{FF2B5EF4-FFF2-40B4-BE49-F238E27FC236}">
-                <a16:creationId xmlns:a16="http://schemas.microsoft.com/office/drawing/2014/main" id="{DB6E4518-E411-41F2-81A1-BE0CBCCC7670}"/>
+                <a16:creationId xmlns:a16="http://schemas.microsoft.com/office/drawing/2014/main" id="{3AE6CD47-ECF7-4766-9DE6-0537C0A529BC}"/>
               </a:ext>
             </a:extLst>
           </p:cNvPr>
@@ -13246,7 +13552,7 @@
           <p:cNvPr id="3" name="">
             <a:extLst xmlns:a="http://schemas.openxmlformats.org/drawingml/2006/main">
               <a:ext uri="{FF2B5EF4-FFF2-40B4-BE49-F238E27FC236}">
-                <a16:creationId xmlns:a16="http://schemas.microsoft.com/office/drawing/2014/main" id="{4BD10C55-1BA8-4320-BB33-E0BCA23A8358}"/>
+                <a16:creationId xmlns:a16="http://schemas.microsoft.com/office/drawing/2014/main" id="{E04E705E-CEF0-42AF-9CCE-47B9F6CAD84A}"/>
               </a:ext>
             </a:extLst>
           </p:cNvPr>
@@ -13278,7 +13584,7 @@
           <p:cNvPr id="4" name="">
             <a:extLst xmlns:a="http://schemas.openxmlformats.org/drawingml/2006/main">
               <a:ext uri="{FF2B5EF4-FFF2-40B4-BE49-F238E27FC236}">
-                <a16:creationId xmlns:a16="http://schemas.microsoft.com/office/drawing/2014/main" id="{BF30154F-440E-4440-922F-CD2D21DF9CA1}"/>
+                <a16:creationId xmlns:a16="http://schemas.microsoft.com/office/drawing/2014/main" id="{59BD623F-8425-490C-BEB4-ED14207123D1}"/>
               </a:ext>
             </a:extLst>
           </p:cNvPr>
@@ -13335,7 +13641,7 @@
           <p:cNvPr id="5" name="">
             <a:extLst xmlns:a="http://schemas.openxmlformats.org/drawingml/2006/main">
               <a:ext uri="{FF2B5EF4-FFF2-40B4-BE49-F238E27FC236}">
-                <a16:creationId xmlns:a16="http://schemas.microsoft.com/office/drawing/2014/main" id="{8FFE12BD-D268-46A1-8977-DEBE1881FF8E}"/>
+                <a16:creationId xmlns:a16="http://schemas.microsoft.com/office/drawing/2014/main" id="{C944E1D5-FD2C-4C9F-8C3D-ADA06B3569BC}"/>
               </a:ext>
             </a:extLst>
           </p:cNvPr>
@@ -13392,7 +13698,7 @@
           <p:cNvPr id="6" name="">
             <a:extLst xmlns:a="http://schemas.openxmlformats.org/drawingml/2006/main">
               <a:ext uri="{FF2B5EF4-FFF2-40B4-BE49-F238E27FC236}">
-                <a16:creationId xmlns:a16="http://schemas.microsoft.com/office/drawing/2014/main" id="{122C0633-FC5B-4BE0-A3AF-67771B29607E}"/>
+                <a16:creationId xmlns:a16="http://schemas.microsoft.com/office/drawing/2014/main" id="{4F9DA849-7266-4BEF-A5E4-5DC1F23E157C}"/>
               </a:ext>
             </a:extLst>
           </p:cNvPr>
@@ -13449,7 +13755,7 @@
           <p:cNvPr id="7" name="">
             <a:extLst xmlns:a="http://schemas.openxmlformats.org/drawingml/2006/main">
               <a:ext uri="{FF2B5EF4-FFF2-40B4-BE49-F238E27FC236}">
-                <a16:creationId xmlns:a16="http://schemas.microsoft.com/office/drawing/2014/main" id="{1720623F-C068-4A9D-B0EC-917ABB38DC90}"/>
+                <a16:creationId xmlns:a16="http://schemas.microsoft.com/office/drawing/2014/main" id="{CDB1DFE3-C556-4384-94CF-D08005A42673}"/>
               </a:ext>
             </a:extLst>
           </p:cNvPr>
@@ -13481,7 +13787,7 @@
           <p:cNvPr id="8" name="">
             <a:extLst xmlns:a="http://schemas.openxmlformats.org/drawingml/2006/main">
               <a:ext uri="{FF2B5EF4-FFF2-40B4-BE49-F238E27FC236}">
-                <a16:creationId xmlns:a16="http://schemas.microsoft.com/office/drawing/2014/main" id="{41F132C7-236A-40F9-8B84-DBE6A0A072ED}"/>
+                <a16:creationId xmlns:a16="http://schemas.microsoft.com/office/drawing/2014/main" id="{0F410A42-75D1-460A-A952-8235249948EA}"/>
               </a:ext>
             </a:extLst>
           </p:cNvPr>
@@ -13538,7 +13844,7 @@
           <p:cNvPr id="9" name="">
             <a:extLst xmlns:a="http://schemas.openxmlformats.org/drawingml/2006/main">
               <a:ext uri="{FF2B5EF4-FFF2-40B4-BE49-F238E27FC236}">
-                <a16:creationId xmlns:a16="http://schemas.microsoft.com/office/drawing/2014/main" id="{D26F8B89-DEB1-4126-8E55-ED9485B56CE2}"/>
+                <a16:creationId xmlns:a16="http://schemas.microsoft.com/office/drawing/2014/main" id="{6A1939D4-14B2-4310-BFEA-86A915E5C127}"/>
               </a:ext>
             </a:extLst>
           </p:cNvPr>
@@ -13595,7 +13901,7 @@
           <p:cNvPr id="10" name="">
             <a:extLst xmlns:a="http://schemas.openxmlformats.org/drawingml/2006/main">
               <a:ext uri="{FF2B5EF4-FFF2-40B4-BE49-F238E27FC236}">
-                <a16:creationId xmlns:a16="http://schemas.microsoft.com/office/drawing/2014/main" id="{36897AB0-D9E5-4178-97D9-767EA0DDF290}"/>
+                <a16:creationId xmlns:a16="http://schemas.microsoft.com/office/drawing/2014/main" id="{47B0BAB1-851B-432B-81AF-FAA99F205B60}"/>
               </a:ext>
             </a:extLst>
           </p:cNvPr>
@@ -13629,7 +13935,7 @@
           <p:cNvPr id="11" name="">
             <a:extLst xmlns:a="http://schemas.openxmlformats.org/drawingml/2006/main">
               <a:ext uri="{FF2B5EF4-FFF2-40B4-BE49-F238E27FC236}">
-                <a16:creationId xmlns:a16="http://schemas.microsoft.com/office/drawing/2014/main" id="{EEA8F68E-2B90-4C30-9231-2D307CC60715}"/>
+                <a16:creationId xmlns:a16="http://schemas.microsoft.com/office/drawing/2014/main" id="{3C17B15B-95ED-4166-939D-738DDFEF609E}"/>
               </a:ext>
             </a:extLst>
           </p:cNvPr>
@@ -13661,7 +13967,7 @@
           <p:cNvPr id="12" name="">
             <a:extLst xmlns:a="http://schemas.openxmlformats.org/drawingml/2006/main">
               <a:ext uri="{FF2B5EF4-FFF2-40B4-BE49-F238E27FC236}">
-                <a16:creationId xmlns:a16="http://schemas.microsoft.com/office/drawing/2014/main" id="{212BCDC9-C3C5-41C6-876A-302A3BE3C161}"/>
+                <a16:creationId xmlns:a16="http://schemas.microsoft.com/office/drawing/2014/main" id="{9AFF6139-4E07-4738-AC72-EFFA0C30AB60}"/>
               </a:ext>
             </a:extLst>
           </p:cNvPr>
@@ -13718,7 +14024,7 @@
           <p:cNvPr id="13" name="">
             <a:extLst xmlns:a="http://schemas.openxmlformats.org/drawingml/2006/main">
               <a:ext uri="{FF2B5EF4-FFF2-40B4-BE49-F238E27FC236}">
-                <a16:creationId xmlns:a16="http://schemas.microsoft.com/office/drawing/2014/main" id="{6A83D0A3-5565-4C09-9642-59CB575D04CC}"/>
+                <a16:creationId xmlns:a16="http://schemas.microsoft.com/office/drawing/2014/main" id="{3FE10420-6AF9-48BC-92C1-414249910175}"/>
               </a:ext>
             </a:extLst>
           </p:cNvPr>
@@ -13775,7 +14081,7 @@
           <p:cNvPr id="14" name="">
             <a:extLst xmlns:a="http://schemas.openxmlformats.org/drawingml/2006/main">
               <a:ext uri="{FF2B5EF4-FFF2-40B4-BE49-F238E27FC236}">
-                <a16:creationId xmlns:a16="http://schemas.microsoft.com/office/drawing/2014/main" id="{BFBDA2D6-9006-4763-BEAC-C08282367CD5}"/>
+                <a16:creationId xmlns:a16="http://schemas.microsoft.com/office/drawing/2014/main" id="{BC22F220-5DA9-461E-9D01-956674A692DD}"/>
               </a:ext>
             </a:extLst>
           </p:cNvPr>
@@ -13809,7 +14115,7 @@
           <p:cNvPr id="15" name="">
             <a:extLst xmlns:a="http://schemas.openxmlformats.org/drawingml/2006/main">
               <a:ext uri="{FF2B5EF4-FFF2-40B4-BE49-F238E27FC236}">
-                <a16:creationId xmlns:a16="http://schemas.microsoft.com/office/drawing/2014/main" id="{3D1A96A5-5132-45B9-BD50-0388E487244E}"/>
+                <a16:creationId xmlns:a16="http://schemas.microsoft.com/office/drawing/2014/main" id="{6CD84459-89D1-4CB3-8A67-BBFB78604210}"/>
               </a:ext>
             </a:extLst>
           </p:cNvPr>
@@ -13841,7 +14147,7 @@
           <p:cNvPr id="16" name="">
             <a:extLst xmlns:a="http://schemas.openxmlformats.org/drawingml/2006/main">
               <a:ext uri="{FF2B5EF4-FFF2-40B4-BE49-F238E27FC236}">
-                <a16:creationId xmlns:a16="http://schemas.microsoft.com/office/drawing/2014/main" id="{9C4A9DC6-56E0-4AC9-BCA4-A6CDDEE4020D}"/>
+                <a16:creationId xmlns:a16="http://schemas.microsoft.com/office/drawing/2014/main" id="{578555AE-880D-4D6C-9DED-A9A5BE2F296F}"/>
               </a:ext>
             </a:extLst>
           </p:cNvPr>
@@ -13898,7 +14204,7 @@
           <p:cNvPr id="17" name="">
             <a:extLst xmlns:a="http://schemas.openxmlformats.org/drawingml/2006/main">
               <a:ext uri="{FF2B5EF4-FFF2-40B4-BE49-F238E27FC236}">
-                <a16:creationId xmlns:a16="http://schemas.microsoft.com/office/drawing/2014/main" id="{901BA9EC-7B1D-4418-8599-0393DB6BD68C}"/>
+                <a16:creationId xmlns:a16="http://schemas.microsoft.com/office/drawing/2014/main" id="{A6BFBD67-BEB5-4ED8-99F0-ED86AD593E89}"/>
               </a:ext>
             </a:extLst>
           </p:cNvPr>
@@ -13955,7 +14261,7 @@
           <p:cNvPr id="18" name="">
             <a:extLst xmlns:a="http://schemas.openxmlformats.org/drawingml/2006/main">
               <a:ext uri="{FF2B5EF4-FFF2-40B4-BE49-F238E27FC236}">
-                <a16:creationId xmlns:a16="http://schemas.microsoft.com/office/drawing/2014/main" id="{3C8A6250-D610-4077-BC5A-47333B5A6D58}"/>
+                <a16:creationId xmlns:a16="http://schemas.microsoft.com/office/drawing/2014/main" id="{ED5A87B6-0D16-4648-ABD6-1CF3295A40A2}"/>
               </a:ext>
             </a:extLst>
           </p:cNvPr>
@@ -13989,7 +14295,7 @@
           <p:cNvPr id="19" name="">
             <a:extLst xmlns:a="http://schemas.openxmlformats.org/drawingml/2006/main">
               <a:ext uri="{FF2B5EF4-FFF2-40B4-BE49-F238E27FC236}">
-                <a16:creationId xmlns:a16="http://schemas.microsoft.com/office/drawing/2014/main" id="{CCF507BF-79DB-4833-A823-F117939F25DF}"/>
+                <a16:creationId xmlns:a16="http://schemas.microsoft.com/office/drawing/2014/main" id="{EF8C18C1-B479-40B4-ABD9-02391390ACD6}"/>
               </a:ext>
             </a:extLst>
           </p:cNvPr>
@@ -14021,7 +14327,7 @@
           <p:cNvPr id="20" name="">
             <a:extLst xmlns:a="http://schemas.openxmlformats.org/drawingml/2006/main">
               <a:ext uri="{FF2B5EF4-FFF2-40B4-BE49-F238E27FC236}">
-                <a16:creationId xmlns:a16="http://schemas.microsoft.com/office/drawing/2014/main" id="{ADD2E4CC-1791-46A8-950C-19514DBE72E0}"/>
+                <a16:creationId xmlns:a16="http://schemas.microsoft.com/office/drawing/2014/main" id="{7AFD1C57-63B4-4F8E-B88E-62DA703EC464}"/>
               </a:ext>
             </a:extLst>
           </p:cNvPr>
@@ -14078,7 +14384,7 @@
           <p:cNvPr id="21" name="">
             <a:extLst xmlns:a="http://schemas.openxmlformats.org/drawingml/2006/main">
               <a:ext uri="{FF2B5EF4-FFF2-40B4-BE49-F238E27FC236}">
-                <a16:creationId xmlns:a16="http://schemas.microsoft.com/office/drawing/2014/main" id="{B1442A81-9B9F-4360-810A-23B8EE1FA867}"/>
+                <a16:creationId xmlns:a16="http://schemas.microsoft.com/office/drawing/2014/main" id="{4F2EA471-FB72-47B0-9CDA-6523117AB273}"/>
               </a:ext>
             </a:extLst>
           </p:cNvPr>
@@ -14133,7 +14439,7 @@
     </p:spTree>
     <p:extLst>
       <p:ext uri="{BB962C8B-B14F-4D97-AF65-F5344CB8AC3E}">
-        <p14:creationId xmlns:p14="http://schemas.microsoft.com/office/powerpoint/2010/main" val="623694724"/>
+        <p14:creationId xmlns:p14="http://schemas.microsoft.com/office/powerpoint/2010/main" val="478396120"/>
       </p:ext>
     </p:extLst>
   </p:cSld>
